--- a/presentations/PR_L08_TwoDimensionalLists_Lesson.pptx
+++ b/presentations/PR_L08_TwoDimensionalLists_Lesson.pptx
@@ -2167,7 +2167,7 @@
                 <a:ea typeface="IBM Plex Sans" pitchFamily="34" charset="-122"/>
                 <a:cs typeface="IBM Plex Sans" pitchFamily="34" charset="-120"/>
               </a:rPr>
-              <a:t>A register, a seating plan and a scoreboard are all grids. A two-dimensional array stores one by putting a list inside a list, and the hall is where you learn to read and total it.</a:t>
+              <a:t>One list holds a line of values, but a lot of data arrives in rows and columns. A two-dimensional array stores that by putting a list inside a list. Work through the six stations and you will read one cell, print a whole grid, total any row or column of it and search it.</a:t>
             </a:r>
             <a:endParaRPr lang="en-US" sz="1800" dirty="0"/>
           </a:p>
@@ -2725,7 +2725,7 @@
                 <a:ea typeface="IBM Plex Sans" pitchFamily="34" charset="-122"/>
                 <a:cs typeface="IBM Plex Sans" pitchFamily="34" charset="-120"/>
               </a:rPr>
-              <a:t>Plan how you would find a name in a seating plan and report its row.</a:t>
+              <a:t>How would you find a word in a grid and report both the row and the column it sits at?</a:t>
             </a:r>
             <a:endParaRPr lang="en-US" sz="1600" dirty="0"/>
           </a:p>
@@ -2805,7 +2805,7 @@
                 <a:ea typeface="IBM Plex Sans" pitchFamily="34" charset="-122"/>
                 <a:cs typeface="IBM Plex Sans" pitchFamily="34" charset="-120"/>
               </a:rPr>
-              <a:t>Searching every cell of a grid in turn is a linear search, just in two dimensions.</a:t>
+              <a:t>Checking every cell of a grid in turn is really a linear search, only in...</a:t>
             </a:r>
             <a:endParaRPr lang="en-US" sz="1600" dirty="0"/>
           </a:p>
@@ -3104,7 +3104,7 @@
                 <a:ea typeface="IBM Plex Sans" pitchFamily="34" charset="-122"/>
                 <a:cs typeface="IBM Plex Sans" pitchFamily="34" charset="-120"/>
               </a:rPr>
-              <a:t>The scoreboard holds [[4, 7, 2], [5, 1, 9]] in a variable called grid. Tap the star and match each piece of Python to what it gives back.</a:t>
+              <a:t>A variable called grid holds [[4, 7, 2], [5, 1, 9]]. Tap the star and match each piece of Python to what it gives back.</a:t>
             </a:r>
             <a:endParaRPr lang="en-US" sz="2200" dirty="0"/>
           </a:p>
@@ -4190,7 +4190,7 @@
                 <a:ea typeface="IBM Plex Sans" pitchFamily="34" charset="-122"/>
                 <a:cs typeface="IBM Plex Sans" pitchFamily="34" charset="-120"/>
               </a:rPr>
-              <a:t>Write a program that reads a grid of 3 rows by 4 columns of merit points and prints the total for each row.</a:t>
+              <a:t>Write a program that reads twelve whole numbers into a grid of three rows of four, then prints the total of each row on a line of its own.</a:t>
             </a:r>
             <a:endParaRPr lang="en-US" sz="1700" dirty="0"/>
           </a:p>
@@ -4320,7 +4320,7 @@
                 <a:ea typeface="IBM Plex Sans" pitchFamily="34" charset="-122"/>
                 <a:cs typeface="IBM Plex Sans" pitchFamily="34" charset="-120"/>
               </a:rPr>
-              <a:t>Write a program that prints a grid of 2 rows by 3 columns of prices that is already stored in the program, one row to a line.</a:t>
+              <a:t>A grid of 2 rows by 3 columns is already stored in a program. Write the code that prints it one row to a line, with single spaces between the values and no brackets.</a:t>
             </a:r>
             <a:endParaRPr lang="en-US" sz="1700" dirty="0"/>
           </a:p>
@@ -4655,7 +4655,7 @@
                 <a:ea typeface="IBM Plex Sans" pitchFamily="34" charset="-122"/>
                 <a:cs typeface="IBM Plex Sans" pitchFamily="34" charset="-120"/>
               </a:rPr>
-              <a:t>Creating a list of lists</a:t>
+              <a:t>Building a list of lists and filling it</a:t>
             </a:r>
             <a:endParaRPr lang="en-US" sz="1800" dirty="0"/>
           </a:p>
@@ -5726,7 +5726,7 @@
                 <a:ea typeface="IBM Plex Sans" pitchFamily="34" charset="-122"/>
                 <a:cs typeface="IBM Plex Sans" pitchFamily="34" charset="-120"/>
               </a:rPr>
-              <a:t>Know how to create a two-dimensional array as a list of lists</a:t>
+              <a:t>Know how to build a two-dimensional list as a list of lists and fill it from input</a:t>
             </a:r>
             <a:endParaRPr lang="en-US" sz="1900" dirty="0"/>
           </a:p>
@@ -5922,7 +5922,7 @@
                 <a:ea typeface="IBM Plex Sans" pitchFamily="34" charset="-122"/>
                 <a:cs typeface="IBM Plex Sans" pitchFamily="34" charset="-120"/>
               </a:rPr>
-              <a:t>Know how to use two nested loops to total a row, a column or a whole grid</a:t>
+              <a:t>Know how to write nested loops that print a grid and total any row or column of it</a:t>
             </a:r>
             <a:endParaRPr lang="en-US" sz="1900" dirty="0"/>
           </a:p>
@@ -8027,7 +8027,7 @@
                 <a:ea typeface="IBM Plex Sans" pitchFamily="34" charset="-122"/>
                 <a:cs typeface="IBM Plex Sans" pitchFamily="34" charset="-120"/>
               </a:rPr>
-              <a:t>A table in a database and a grid in a program are stored much the same way: rows made of fields.</a:t>
+              <a:t>A grid is stored much the way a database table is, with every row holding one list of...</a:t>
             </a:r>
             <a:endParaRPr lang="en-US" sz="1600" dirty="0"/>
           </a:p>
@@ -8603,7 +8603,7 @@
                 <a:ea typeface="IBM Plex Sans" pitchFamily="34" charset="-122"/>
                 <a:cs typeface="IBM Plex Sans" pitchFamily="34" charset="-120"/>
               </a:rPr>
-              <a:t>The exam writes this cell as array[1,2]; Python writes exactly the same cell as grid[1][2].</a:t>
+              <a:t>The exam writes a cell as array[1,2], where Python writes that very same cell as...</a:t>
             </a:r>
             <a:endParaRPr lang="en-US" sz="1600" dirty="0"/>
           </a:p>
@@ -9179,7 +9179,7 @@
                 <a:ea typeface="IBM Plex Sans" pitchFamily="34" charset="-122"/>
                 <a:cs typeface="IBM Plex Sans" pitchFamily="34" charset="-120"/>
               </a:rPr>
-              <a:t>A grid of 10 rows by 10 columns holds 100 cells, so a nested loop over it runs 100 times.</a:t>
+              <a:t>A grid of 10 rows by 10 columns holds 100 cells, so a nested loop over it runs...</a:t>
             </a:r>
             <a:endParaRPr lang="en-US" sz="1600" dirty="0"/>
           </a:p>
@@ -9755,7 +9755,7 @@
                 <a:ea typeface="IBM Plex Sans" pitchFamily="34" charset="-122"/>
                 <a:cs typeface="IBM Plex Sans" pitchFamily="34" charset="-120"/>
               </a:rPr>
-              <a:t>Totalling every row and then totalling those totals gives the grand total of the whole grid.</a:t>
+              <a:t>Add up every row total and the number you are left with is the total of...</a:t>
             </a:r>
             <a:endParaRPr lang="en-US" sz="1600" dirty="0"/>
           </a:p>
@@ -10331,7 +10331,7 @@
                 <a:ea typeface="IBM Plex Sans" pitchFamily="34" charset="-122"/>
                 <a:cs typeface="IBM Plex Sans" pitchFamily="34" charset="-120"/>
               </a:rPr>
-              <a:t>Swapping the two loops over turns a row total into a column total, and nothing else changes.</a:t>
+              <a:t>A row total and a column total are the same few lines with the two indexes...</a:t>
             </a:r>
             <a:endParaRPr lang="en-US" sz="1600" dirty="0"/>
           </a:p>

--- a/presentations/PR_L08_TwoDimensionalLists_Lesson.pptx
+++ b/presentations/PR_L08_TwoDimensionalLists_Lesson.pptx
@@ -4060,7 +4060,296 @@
                 <a:ea typeface="IBM Plex Sans" pitchFamily="34" charset="-122"/>
                 <a:cs typeface="IBM Plex Sans" pitchFamily="34" charset="-120"/>
               </a:rPr>
-              <a:t>A program that should total column 2 of a grid of 4 rows by 3 columns begins its loop with for r in range(len(grid[0])). Explain why this looks at the wrong number of cells, and write the line corrected.</a:t>
+              <a:t>A program that should total column 2 of a grid of 4 rows by 3 columns begins its loop with </a:t>
+            </a:r>
+            <a:pPr indent="0" marL="0">
+              <a:lnSpc>
+                <a:spcPct val="118000"/>
+              </a:lnSpc>
+              <a:buNone/>
+            </a:pPr>
+            <a:r>
+              <a:rPr lang="en-US" sz="1700" dirty="0">
+                <a:solidFill>
+                  <a:srgbClr val="6B21A8"/>
+                </a:solidFill>
+                <a:latin typeface="IBM Plex Mono" pitchFamily="34" charset="0"/>
+                <a:ea typeface="IBM Plex Mono" pitchFamily="34" charset="-122"/>
+                <a:cs typeface="IBM Plex Mono" pitchFamily="34" charset="-120"/>
+              </a:rPr>
+              <a:t>for</a:t>
+            </a:r>
+            <a:pPr indent="0" marL="0">
+              <a:lnSpc>
+                <a:spcPct val="118000"/>
+              </a:lnSpc>
+              <a:buNone/>
+            </a:pPr>
+            <a:r>
+              <a:rPr lang="en-US" sz="1700" dirty="0">
+                <a:solidFill>
+                  <a:srgbClr val="18181B"/>
+                </a:solidFill>
+                <a:latin typeface="IBM Plex Mono" pitchFamily="34" charset="0"/>
+                <a:ea typeface="IBM Plex Mono" pitchFamily="34" charset="-122"/>
+                <a:cs typeface="IBM Plex Mono" pitchFamily="34" charset="-120"/>
+              </a:rPr>
+              <a:t> </a:t>
+            </a:r>
+            <a:pPr indent="0" marL="0">
+              <a:lnSpc>
+                <a:spcPct val="118000"/>
+              </a:lnSpc>
+              <a:buNone/>
+            </a:pPr>
+            <a:r>
+              <a:rPr lang="en-US" sz="1700" dirty="0">
+                <a:solidFill>
+                  <a:srgbClr val="18181B"/>
+                </a:solidFill>
+                <a:latin typeface="IBM Plex Mono" pitchFamily="34" charset="0"/>
+                <a:ea typeface="IBM Plex Mono" pitchFamily="34" charset="-122"/>
+                <a:cs typeface="IBM Plex Mono" pitchFamily="34" charset="-120"/>
+              </a:rPr>
+              <a:t>r</a:t>
+            </a:r>
+            <a:pPr indent="0" marL="0">
+              <a:lnSpc>
+                <a:spcPct val="118000"/>
+              </a:lnSpc>
+              <a:buNone/>
+            </a:pPr>
+            <a:r>
+              <a:rPr lang="en-US" sz="1700" dirty="0">
+                <a:solidFill>
+                  <a:srgbClr val="18181B"/>
+                </a:solidFill>
+                <a:latin typeface="IBM Plex Mono" pitchFamily="34" charset="0"/>
+                <a:ea typeface="IBM Plex Mono" pitchFamily="34" charset="-122"/>
+                <a:cs typeface="IBM Plex Mono" pitchFamily="34" charset="-120"/>
+              </a:rPr>
+              <a:t> </a:t>
+            </a:r>
+            <a:pPr indent="0" marL="0">
+              <a:lnSpc>
+                <a:spcPct val="118000"/>
+              </a:lnSpc>
+              <a:buNone/>
+            </a:pPr>
+            <a:r>
+              <a:rPr lang="en-US" sz="1700" dirty="0">
+                <a:solidFill>
+                  <a:srgbClr val="6B21A8"/>
+                </a:solidFill>
+                <a:latin typeface="IBM Plex Mono" pitchFamily="34" charset="0"/>
+                <a:ea typeface="IBM Plex Mono" pitchFamily="34" charset="-122"/>
+                <a:cs typeface="IBM Plex Mono" pitchFamily="34" charset="-120"/>
+              </a:rPr>
+              <a:t>in</a:t>
+            </a:r>
+            <a:pPr indent="0" marL="0">
+              <a:lnSpc>
+                <a:spcPct val="118000"/>
+              </a:lnSpc>
+              <a:buNone/>
+            </a:pPr>
+            <a:r>
+              <a:rPr lang="en-US" sz="1700" dirty="0">
+                <a:solidFill>
+                  <a:srgbClr val="18181B"/>
+                </a:solidFill>
+                <a:latin typeface="IBM Plex Mono" pitchFamily="34" charset="0"/>
+                <a:ea typeface="IBM Plex Mono" pitchFamily="34" charset="-122"/>
+                <a:cs typeface="IBM Plex Mono" pitchFamily="34" charset="-120"/>
+              </a:rPr>
+              <a:t> </a:t>
+            </a:r>
+            <a:pPr indent="0" marL="0">
+              <a:lnSpc>
+                <a:spcPct val="118000"/>
+              </a:lnSpc>
+              <a:buNone/>
+            </a:pPr>
+            <a:r>
+              <a:rPr lang="en-US" sz="1700" dirty="0">
+                <a:solidFill>
+                  <a:srgbClr val="1D4ED8"/>
+                </a:solidFill>
+                <a:latin typeface="IBM Plex Mono" pitchFamily="34" charset="0"/>
+                <a:ea typeface="IBM Plex Mono" pitchFamily="34" charset="-122"/>
+                <a:cs typeface="IBM Plex Mono" pitchFamily="34" charset="-120"/>
+              </a:rPr>
+              <a:t>range</a:t>
+            </a:r>
+            <a:pPr indent="0" marL="0">
+              <a:lnSpc>
+                <a:spcPct val="118000"/>
+              </a:lnSpc>
+              <a:buNone/>
+            </a:pPr>
+            <a:r>
+              <a:rPr lang="en-US" sz="1700" dirty="0">
+                <a:solidFill>
+                  <a:srgbClr val="3F3F46"/>
+                </a:solidFill>
+                <a:latin typeface="IBM Plex Mono" pitchFamily="34" charset="0"/>
+                <a:ea typeface="IBM Plex Mono" pitchFamily="34" charset="-122"/>
+                <a:cs typeface="IBM Plex Mono" pitchFamily="34" charset="-120"/>
+              </a:rPr>
+              <a:t>(</a:t>
+            </a:r>
+            <a:pPr indent="0" marL="0">
+              <a:lnSpc>
+                <a:spcPct val="118000"/>
+              </a:lnSpc>
+              <a:buNone/>
+            </a:pPr>
+            <a:r>
+              <a:rPr lang="en-US" sz="1700" dirty="0">
+                <a:solidFill>
+                  <a:srgbClr val="1D4ED8"/>
+                </a:solidFill>
+                <a:latin typeface="IBM Plex Mono" pitchFamily="34" charset="0"/>
+                <a:ea typeface="IBM Plex Mono" pitchFamily="34" charset="-122"/>
+                <a:cs typeface="IBM Plex Mono" pitchFamily="34" charset="-120"/>
+              </a:rPr>
+              <a:t>len</a:t>
+            </a:r>
+            <a:pPr indent="0" marL="0">
+              <a:lnSpc>
+                <a:spcPct val="118000"/>
+              </a:lnSpc>
+              <a:buNone/>
+            </a:pPr>
+            <a:r>
+              <a:rPr lang="en-US" sz="1700" dirty="0">
+                <a:solidFill>
+                  <a:srgbClr val="3F3F46"/>
+                </a:solidFill>
+                <a:latin typeface="IBM Plex Mono" pitchFamily="34" charset="0"/>
+                <a:ea typeface="IBM Plex Mono" pitchFamily="34" charset="-122"/>
+                <a:cs typeface="IBM Plex Mono" pitchFamily="34" charset="-120"/>
+              </a:rPr>
+              <a:t>(</a:t>
+            </a:r>
+            <a:pPr indent="0" marL="0">
+              <a:lnSpc>
+                <a:spcPct val="118000"/>
+              </a:lnSpc>
+              <a:buNone/>
+            </a:pPr>
+            <a:r>
+              <a:rPr lang="en-US" sz="1700" dirty="0">
+                <a:solidFill>
+                  <a:srgbClr val="18181B"/>
+                </a:solidFill>
+                <a:latin typeface="IBM Plex Mono" pitchFamily="34" charset="0"/>
+                <a:ea typeface="IBM Plex Mono" pitchFamily="34" charset="-122"/>
+                <a:cs typeface="IBM Plex Mono" pitchFamily="34" charset="-120"/>
+              </a:rPr>
+              <a:t>grid</a:t>
+            </a:r>
+            <a:pPr indent="0" marL="0">
+              <a:lnSpc>
+                <a:spcPct val="118000"/>
+              </a:lnSpc>
+              <a:buNone/>
+            </a:pPr>
+            <a:r>
+              <a:rPr lang="en-US" sz="1700" dirty="0">
+                <a:solidFill>
+                  <a:srgbClr val="3F3F46"/>
+                </a:solidFill>
+                <a:latin typeface="IBM Plex Mono" pitchFamily="34" charset="0"/>
+                <a:ea typeface="IBM Plex Mono" pitchFamily="34" charset="-122"/>
+                <a:cs typeface="IBM Plex Mono" pitchFamily="34" charset="-120"/>
+              </a:rPr>
+              <a:t>[</a:t>
+            </a:r>
+            <a:pPr indent="0" marL="0">
+              <a:lnSpc>
+                <a:spcPct val="118000"/>
+              </a:lnSpc>
+              <a:buNone/>
+            </a:pPr>
+            <a:r>
+              <a:rPr lang="en-US" sz="1700" dirty="0">
+                <a:solidFill>
+                  <a:srgbClr val="9A3412"/>
+                </a:solidFill>
+                <a:latin typeface="IBM Plex Mono" pitchFamily="34" charset="0"/>
+                <a:ea typeface="IBM Plex Mono" pitchFamily="34" charset="-122"/>
+                <a:cs typeface="IBM Plex Mono" pitchFamily="34" charset="-120"/>
+              </a:rPr>
+              <a:t>0</a:t>
+            </a:r>
+            <a:pPr indent="0" marL="0">
+              <a:lnSpc>
+                <a:spcPct val="118000"/>
+              </a:lnSpc>
+              <a:buNone/>
+            </a:pPr>
+            <a:r>
+              <a:rPr lang="en-US" sz="1700" dirty="0">
+                <a:solidFill>
+                  <a:srgbClr val="3F3F46"/>
+                </a:solidFill>
+                <a:latin typeface="IBM Plex Mono" pitchFamily="34" charset="0"/>
+                <a:ea typeface="IBM Plex Mono" pitchFamily="34" charset="-122"/>
+                <a:cs typeface="IBM Plex Mono" pitchFamily="34" charset="-120"/>
+              </a:rPr>
+              <a:t>]</a:t>
+            </a:r>
+            <a:pPr indent="0" marL="0">
+              <a:lnSpc>
+                <a:spcPct val="118000"/>
+              </a:lnSpc>
+              <a:buNone/>
+            </a:pPr>
+            <a:r>
+              <a:rPr lang="en-US" sz="1700" dirty="0">
+                <a:solidFill>
+                  <a:srgbClr val="3F3F46"/>
+                </a:solidFill>
+                <a:latin typeface="IBM Plex Mono" pitchFamily="34" charset="0"/>
+                <a:ea typeface="IBM Plex Mono" pitchFamily="34" charset="-122"/>
+                <a:cs typeface="IBM Plex Mono" pitchFamily="34" charset="-120"/>
+              </a:rPr>
+              <a:t>)</a:t>
+            </a:r>
+            <a:pPr indent="0" marL="0">
+              <a:lnSpc>
+                <a:spcPct val="118000"/>
+              </a:lnSpc>
+              <a:buNone/>
+            </a:pPr>
+            <a:r>
+              <a:rPr lang="en-US" sz="1700" dirty="0">
+                <a:solidFill>
+                  <a:srgbClr val="3F3F46"/>
+                </a:solidFill>
+                <a:latin typeface="IBM Plex Mono" pitchFamily="34" charset="0"/>
+                <a:ea typeface="IBM Plex Mono" pitchFamily="34" charset="-122"/>
+                <a:cs typeface="IBM Plex Mono" pitchFamily="34" charset="-120"/>
+              </a:rPr>
+              <a:t>)</a:t>
+            </a:r>
+            <a:pPr indent="0" marL="0">
+              <a:lnSpc>
+                <a:spcPct val="118000"/>
+              </a:lnSpc>
+              <a:buNone/>
+            </a:pPr>
+            <a:r>
+              <a:rPr lang="en-US" sz="1700" dirty="0">
+                <a:solidFill>
+                  <a:srgbClr val="101828"/>
+                </a:solidFill>
+                <a:latin typeface="IBM Plex Sans" pitchFamily="34" charset="0"/>
+                <a:ea typeface="IBM Plex Sans" pitchFamily="34" charset="-122"/>
+                <a:cs typeface="IBM Plex Sans" pitchFamily="34" charset="-120"/>
+              </a:rPr>
+              <a:t>. Explain why this looks at the wrong number of cells, and write the line corrected.</a:t>
             </a:r>
             <a:endParaRPr lang="en-US" sz="1700" dirty="0"/>
           </a:p>

--- a/presentations/PR_L08_TwoDimensionalLists_Lesson.pptx
+++ b/presentations/PR_L08_TwoDimensionalLists_Lesson.pptx
@@ -19,9 +19,10 @@
     <p:sldId id="267" r:id="rId13"/>
     <p:sldId id="268" r:id="rId14"/>
     <p:sldId id="269" r:id="rId15"/>
+    <p:sldId id="270" r:id="rId16"/>
   </p:sldIdLst>
   <p:notesMasterIdLst>
-    <p:notesMasterId r:id="rId16"/>
+    <p:notesMasterId r:id="rId17"/>
   </p:notesMasterIdLst>
   <p:sldSz cx="12192000" cy="6858000"/>
   <p:notesSz cx="6858000" cy="12192000"/>
@@ -692,7 +693,14 @@
           <a:p>
             <a:r>
               <a:rPr lang="en-US" dirty="0"/>
-              <a:t>Make them commit to an answer on paper before they tap the star. Guessing first costs them the learning.</a:t>
+              <a:t>The answer is B: 15
+3.
+Do not say it yet. Every pupil commits first - fingers, whiteboards or a show of hands on each letter in turn - and you count the split before anyone can change their mind.
+IF MOST OF THE CLASS IS RIGHT: say why it is right in one sentence and go straight on to the independent work.
+IF A SIGNIFICANT GROUP IS ON ONE WRONG LETTER: that option is the misconception to teach against before anyone goes on. Go back to station 4, Totalling a row, and work through its example again, aloud, with the class watching, then re-ask this question.
+The course's own response to a wrong answer here: Row 0 is 4, 9 and 2, which comes to 15, and that row holds three values. len(grid) would have said 2.
+A limitation, stated rather than papered over: one response covers every wrong option; it does not say what to revisit for each one. The course does not record what each separate wrong option means, and this slide does not invent it. Decide your own reteach for each option before the lesson; the options above are the start of it.
+This is a real activity from the experience (pr-l08-s4-c2), so the wording here is the wording a pupil will see.</a:t>
             </a:r>
             <a:endParaRPr lang="en-US" dirty="0"/>
           </a:p>
@@ -780,7 +788,7 @@
           <a:p>
             <a:r>
               <a:rPr lang="en-US" dirty="0"/>
-              <a:t>Use these as a settler, or as something for early finishers to read in the experience.</a:t>
+              <a:t>Make them commit to an answer on paper before they tap the star. Guessing first costs them the learning.</a:t>
             </a:r>
             <a:endParaRPr lang="en-US" dirty="0"/>
           </a:p>
@@ -868,7 +876,7 @@
           <a:p>
             <a:r>
               <a:rPr lang="en-US" dirty="0"/>
-              <a:t>Timed and silent. Mark against the answer sheet, then ask students to record their weakest area.</a:t>
+              <a:t>Use these as a settler, or as something for early finishers to read in the experience.</a:t>
             </a:r>
             <a:endParaRPr lang="en-US" dirty="0"/>
           </a:p>
@@ -956,7 +964,7 @@
           <a:p>
             <a:r>
               <a:rPr lang="en-US" dirty="0"/>
-              <a:t>Students copy their score-screen breakdown onto the worksheet, then rate themselves here.</a:t>
+              <a:t>Timed and silent. Mark against the answer sheet, then ask students to record their weakest area.</a:t>
             </a:r>
             <a:endParaRPr lang="en-US" dirty="0"/>
           </a:p>
@@ -980,6 +988,94 @@
             <a:fld id="{F7021451-1387-4CA6-816F-3879F97B5CBC}" type="slidenum">
               <a:rPr lang="en-US"/>
               <a:t>14</a:t>
+            </a:fld>
+            <a:endParaRPr lang="en-US"/>
+          </a:p>
+        </p:txBody>
+      </p:sp>
+    </p:spTree>
+    <p:extLst>
+      <p:ext uri="{BB962C8B-B14F-4D97-AF65-F5344CB8AC3E}">
+        <p14:creationId xmlns:p14="http://schemas.microsoft.com/office/powerpoint/2010/main" val="1024086991"/>
+      </p:ext>
+    </p:extLst>
+  </p:cSld>
+  <p:clrMapOvr>
+    <a:masterClrMapping/>
+  </p:clrMapOvr>
+</p:notes>
+</file>
+
+<file path=ppt/notesSlides/notesSlide15.xml><?xml version="1.0" encoding="utf-8"?>
+<p:notes xmlns:a="http://schemas.openxmlformats.org/drawingml/2006/main" xmlns:r="http://schemas.openxmlformats.org/officeDocument/2006/relationships" xmlns:p="http://schemas.openxmlformats.org/presentationml/2006/main">
+  <p:cSld>
+    <p:spTree>
+      <p:nvGrpSpPr>
+        <p:cNvPr id="1" name=""/>
+        <p:cNvGrpSpPr/>
+        <p:nvPr/>
+      </p:nvGrpSpPr>
+      <p:grpSpPr>
+        <a:xfrm>
+          <a:off x="0" y="0"/>
+          <a:ext cx="0" cy="0"/>
+          <a:chOff x="0" y="0"/>
+          <a:chExt cx="0" cy="0"/>
+        </a:xfrm>
+      </p:grpSpPr>
+      <p:sp>
+        <p:nvSpPr>
+          <p:cNvPr id="2" name="Slide Image Placeholder 1"/>
+          <p:cNvSpPr>
+            <a:spLocks noGrp="1" noRot="1" noChangeAspect="1"/>
+          </p:cNvSpPr>
+          <p:nvPr>
+            <p:ph type="sldImg"/>
+          </p:nvPr>
+        </p:nvSpPr>
+        <p:spPr/>
+      </p:sp>
+      <p:sp>
+        <p:nvSpPr>
+          <p:cNvPr id="3" name="Notes Placeholder 2"/>
+          <p:cNvSpPr>
+            <a:spLocks noGrp="1"/>
+          </p:cNvSpPr>
+          <p:nvPr>
+            <p:ph type="body" idx="1"/>
+          </p:nvPr>
+        </p:nvSpPr>
+        <p:spPr/>
+        <p:txBody>
+          <a:bodyPr/>
+          <a:lstStyle/>
+          <a:p>
+            <a:r>
+              <a:rPr lang="en-US" dirty="0"/>
+              <a:t>Students copy their score-screen breakdown onto the worksheet, then rate themselves here.</a:t>
+            </a:r>
+            <a:endParaRPr lang="en-US" dirty="0"/>
+          </a:p>
+        </p:txBody>
+      </p:sp>
+      <p:sp>
+        <p:nvSpPr>
+          <p:cNvPr id="4" name="Slide Number Placeholder 3"/>
+          <p:cNvSpPr>
+            <a:spLocks noGrp="1"/>
+          </p:cNvSpPr>
+          <p:nvPr>
+            <p:ph type="sldNum" sz="quarter" idx="10"/>
+          </p:nvPr>
+        </p:nvSpPr>
+        <p:spPr/>
+        <p:txBody>
+          <a:bodyPr/>
+          <a:lstStyle/>
+          <a:p>
+            <a:fld id="{F7021451-1387-4CA6-816F-3879F97B5CBC}" type="slidenum">
+              <a:rPr lang="en-US"/>
+              <a:t>15</a:t>
             </a:fld>
             <a:endParaRPr lang="en-US"/>
           </a:p>
@@ -2949,12 +3045,12 @@
         </p:nvSpPr>
         <p:spPr>
           <a:xfrm>
-            <a:off x="502920" y="438912"/>
-            <a:ext cx="3108960" cy="502920"/>
+            <a:off x="502920" y="457200"/>
+            <a:ext cx="1051560" cy="420624"/>
           </a:xfrm>
           <a:prstGeom prst="roundRect">
             <a:avLst>
-              <a:gd name="adj" fmla="val 18182"/>
+              <a:gd name="adj" fmla="val 21739"/>
             </a:avLst>
           </a:prstGeom>
           <a:solidFill>
@@ -2971,8 +3067,8 @@
         </p:nvSpPr>
         <p:spPr>
           <a:xfrm>
-            <a:off x="502920" y="438912"/>
-            <a:ext cx="3108960" cy="502920"/>
+            <a:off x="502920" y="457200"/>
+            <a:ext cx="1051560" cy="420624"/>
           </a:xfrm>
           <a:prstGeom prst="rect">
             <a:avLst/>
@@ -2988,7 +3084,7 @@
               <a:buNone/>
             </a:pPr>
             <a:r>
-              <a:rPr lang="en-US" sz="1300" b="1" dirty="0">
+              <a:rPr lang="en-US" sz="1200" b="1" dirty="0">
                 <a:solidFill>
                   <a:srgbClr val="101828"/>
                 </a:solidFill>
@@ -2996,9 +3092,9 @@
                 <a:ea typeface="IBM Plex Mono" pitchFamily="34" charset="-122"/>
                 <a:cs typeface="IBM Plex Mono" pitchFamily="34" charset="-120"/>
               </a:rPr>
-              <a:t>★  FINAL CHALLENGE</a:t>
-            </a:r>
-            <a:endParaRPr lang="en-US" sz="1300" dirty="0"/>
+              <a:t>CHECK</a:t>
+            </a:r>
+            <a:endParaRPr lang="en-US" sz="1200" dirty="0"/>
           </a:p>
         </p:txBody>
       </p:sp>
@@ -3010,51 +3106,93 @@
         </p:nvSpPr>
         <p:spPr>
           <a:xfrm>
-            <a:off x="502920" y="1097280"/>
-            <a:ext cx="11155680" cy="731520"/>
-          </a:xfrm>
-          <a:prstGeom prst="rect">
-            <a:avLst/>
-          </a:prstGeom>
-          <a:noFill/>
-          <a:ln/>
-        </p:spPr>
-        <p:txBody>
-          <a:bodyPr wrap="square" lIns="0" tIns="0" rIns="0" bIns="0" rtlCol="0" anchor="ctr"/>
-          <a:lstStyle/>
-          <a:p>
-            <a:pPr indent="0" marL="0">
-              <a:buNone/>
-            </a:pPr>
-            <a:r>
-              <a:rPr lang="en-US" sz="3400" b="1" dirty="0">
-                <a:solidFill>
-                  <a:srgbClr val="101828"/>
+            <a:off x="1737360" y="457200"/>
+            <a:ext cx="9875520" cy="420624"/>
+          </a:xfrm>
+          <a:prstGeom prst="rect">
+            <a:avLst/>
+          </a:prstGeom>
+          <a:noFill/>
+          <a:ln/>
+        </p:spPr>
+        <p:txBody>
+          <a:bodyPr wrap="square" lIns="0" tIns="0" rIns="0" bIns="0" rtlCol="0" anchor="ctr"/>
+          <a:lstStyle/>
+          <a:p>
+            <a:pPr indent="0" marL="0">
+              <a:buNone/>
+            </a:pPr>
+            <a:r>
+              <a:rPr lang="en-US" sz="1500" dirty="0">
+                <a:solidFill>
+                  <a:srgbClr val="667085"/>
                 </a:solidFill>
                 <a:latin typeface="IBM Plex Sans" pitchFamily="34" charset="0"/>
                 <a:ea typeface="IBM Plex Sans" pitchFamily="34" charset="-122"/>
                 <a:cs typeface="IBM Plex Sans" pitchFamily="34" charset="-120"/>
               </a:rPr>
-              <a:t>Read the grid</a:t>
-            </a:r>
-            <a:endParaRPr lang="en-US" sz="3400" dirty="0"/>
-          </a:p>
-        </p:txBody>
-      </p:sp>
-      <p:sp>
-        <p:nvSpPr>
-          <p:cNvPr id="8" name="Shape 6"/>
+              <a:t>Hands down. Everyone commits.</a:t>
+            </a:r>
+            <a:endParaRPr lang="en-US" sz="1500" dirty="0"/>
+          </a:p>
+        </p:txBody>
+      </p:sp>
+      <p:sp>
+        <p:nvSpPr>
+          <p:cNvPr id="8" name="Text 6"/>
+          <p:cNvSpPr txBox="1"/>
+          <p:nvPr/>
+        </p:nvSpPr>
+        <p:spPr>
+          <a:xfrm>
+            <a:off x="502920" y="1097280"/>
+            <a:ext cx="11155680" cy="914400"/>
+          </a:xfrm>
+          <a:prstGeom prst="rect">
+            <a:avLst/>
+          </a:prstGeom>
+          <a:noFill/>
+          <a:ln/>
+        </p:spPr>
+        <p:txBody>
+          <a:bodyPr wrap="square" lIns="0" tIns="0" rIns="0" bIns="0" rtlCol="0" anchor="ctr"/>
+          <a:lstStyle/>
+          <a:p>
+            <a:pPr indent="0" marL="0">
+              <a:lnSpc>
+                <a:spcPct val="115000"/>
+              </a:lnSpc>
+              <a:buNone/>
+            </a:pPr>
+            <a:r>
+              <a:rPr lang="en-US" sz="2600" b="1" dirty="0">
+                <a:solidFill>
+                  <a:srgbClr val="101828"/>
+                </a:solidFill>
+                <a:latin typeface="IBM Plex Sans" pitchFamily="34" charset="0"/>
+                <a:ea typeface="IBM Plex Sans" pitchFamily="34" charset="-122"/>
+                <a:cs typeface="IBM Plex Sans" pitchFamily="34" charset="-120"/>
+              </a:rPr>
+              <a:t>What will this program display?</a:t>
+            </a:r>
+            <a:endParaRPr lang="en-US" sz="2600" dirty="0"/>
+          </a:p>
+        </p:txBody>
+      </p:sp>
+      <p:sp>
+        <p:nvSpPr>
+          <p:cNvPr id="9" name="Shape 7"/>
           <p:cNvSpPr/>
           <p:nvPr/>
         </p:nvSpPr>
         <p:spPr>
           <a:xfrm>
-            <a:off x="502920" y="2011680"/>
-            <a:ext cx="11155680" cy="2194560"/>
+            <a:off x="502920" y="2148840"/>
+            <a:ext cx="5029200" cy="2377440"/>
           </a:xfrm>
           <a:prstGeom prst="roundRect">
             <a:avLst>
-              <a:gd name="adj" fmla="val 5000"/>
+              <a:gd name="adj" fmla="val 4615"/>
             </a:avLst>
           </a:prstGeom>
           <a:solidFill>
@@ -3062,7 +3200,7 @@
           </a:solidFill>
           <a:ln w="15875">
             <a:solidFill>
-              <a:srgbClr val="2D63FF"/>
+              <a:srgbClr val="D9DEE7"/>
             </a:solidFill>
             <a:prstDash val="solid"/>
           </a:ln>
@@ -3070,33 +3208,283 @@
       </p:sp>
       <p:sp>
         <p:nvSpPr>
-          <p:cNvPr id="9" name="Text 7"/>
-          <p:cNvSpPr txBox="1"/>
-          <p:nvPr/>
-        </p:nvSpPr>
-        <p:spPr>
-          <a:xfrm>
-            <a:off x="1005840" y="2331720"/>
-            <a:ext cx="10149840" cy="1554480"/>
-          </a:xfrm>
-          <a:prstGeom prst="rect">
-            <a:avLst/>
-          </a:prstGeom>
-          <a:noFill/>
-          <a:ln/>
-        </p:spPr>
-        <p:txBody>
-          <a:bodyPr wrap="square" lIns="0" tIns="0" rIns="0" bIns="0" rtlCol="0" anchor="ctr"/>
+          <p:cNvPr id="10" name="Text 8"/>
+          <p:cNvSpPr txBox="1"/>
+          <p:nvPr/>
+        </p:nvSpPr>
+        <p:spPr>
+          <a:xfrm>
+            <a:off x="822960" y="2350008"/>
+            <a:ext cx="4480560" cy="1975104"/>
+          </a:xfrm>
+          <a:prstGeom prst="rect">
+            <a:avLst/>
+          </a:prstGeom>
+          <a:noFill/>
+          <a:ln/>
+        </p:spPr>
+        <p:txBody>
+          <a:bodyPr wrap="square" lIns="0" tIns="0" rIns="0" bIns="0" rtlCol="0" anchor="t"/>
           <a:lstStyle/>
           <a:p>
             <a:pPr indent="0" marL="0">
               <a:lnSpc>
-                <a:spcPct val="130000"/>
+                <a:spcPct val="125000"/>
               </a:lnSpc>
               <a:buNone/>
             </a:pPr>
             <a:r>
-              <a:rPr lang="en-US" sz="2200" dirty="0">
+              <a:rPr lang="en-US" sz="1500" dirty="0">
+                <a:solidFill>
+                  <a:srgbClr val="101828"/>
+                </a:solidFill>
+                <a:latin typeface="IBM Plex Mono" pitchFamily="34" charset="0"/>
+                <a:ea typeface="IBM Plex Mono" pitchFamily="34" charset="-122"/>
+                <a:cs typeface="IBM Plex Mono" pitchFamily="34" charset="-120"/>
+              </a:rPr>
+              <a:t>grid = [[4, 9, 2],</a:t>
+            </a:r>
+            <a:endParaRPr lang="en-US" sz="1500" dirty="0"/>
+          </a:p>
+          <a:p>
+            <a:pPr indent="0" marL="0">
+              <a:lnSpc>
+                <a:spcPct val="125000"/>
+              </a:lnSpc>
+              <a:buNone/>
+            </a:pPr>
+            <a:r>
+              <a:rPr lang="en-US" sz="1500" dirty="0">
+                <a:solidFill>
+                  <a:srgbClr val="101828"/>
+                </a:solidFill>
+                <a:latin typeface="IBM Plex Mono" pitchFamily="34" charset="0"/>
+                <a:ea typeface="IBM Plex Mono" pitchFamily="34" charset="-122"/>
+                <a:cs typeface="IBM Plex Mono" pitchFamily="34" charset="-120"/>
+              </a:rPr>
+              <a:t>        [7, 8, 1]]</a:t>
+            </a:r>
+            <a:endParaRPr lang="en-US" sz="1500" dirty="0"/>
+          </a:p>
+          <a:p>
+            <a:pPr indent="0" marL="0">
+              <a:lnSpc>
+                <a:spcPct val="125000"/>
+              </a:lnSpc>
+              <a:buNone/>
+            </a:pPr>
+            <a:r>
+              <a:rPr lang="en-US" sz="1500" dirty="0">
+                <a:solidFill>
+                  <a:srgbClr val="101828"/>
+                </a:solidFill>
+                <a:latin typeface="IBM Plex Mono" pitchFamily="34" charset="0"/>
+                <a:ea typeface="IBM Plex Mono" pitchFamily="34" charset="-122"/>
+                <a:cs typeface="IBM Plex Mono" pitchFamily="34" charset="-120"/>
+              </a:rPr>
+              <a:t>total = 0</a:t>
+            </a:r>
+            <a:endParaRPr lang="en-US" sz="1500" dirty="0"/>
+          </a:p>
+          <a:p>
+            <a:pPr indent="0" marL="0">
+              <a:lnSpc>
+                <a:spcPct val="125000"/>
+              </a:lnSpc>
+              <a:buNone/>
+            </a:pPr>
+            <a:r>
+              <a:rPr lang="en-US" sz="1500" dirty="0">
+                <a:solidFill>
+                  <a:srgbClr val="101828"/>
+                </a:solidFill>
+                <a:latin typeface="IBM Plex Mono" pitchFamily="34" charset="0"/>
+                <a:ea typeface="IBM Plex Mono" pitchFamily="34" charset="-122"/>
+                <a:cs typeface="IBM Plex Mono" pitchFamily="34" charset="-120"/>
+              </a:rPr>
+              <a:t>for v in grid[0]:</a:t>
+            </a:r>
+            <a:endParaRPr lang="en-US" sz="1500" dirty="0"/>
+          </a:p>
+          <a:p>
+            <a:pPr indent="0" marL="0">
+              <a:lnSpc>
+                <a:spcPct val="125000"/>
+              </a:lnSpc>
+              <a:buNone/>
+            </a:pPr>
+            <a:r>
+              <a:rPr lang="en-US" sz="1500" dirty="0">
+                <a:solidFill>
+                  <a:srgbClr val="101828"/>
+                </a:solidFill>
+                <a:latin typeface="IBM Plex Mono" pitchFamily="34" charset="0"/>
+                <a:ea typeface="IBM Plex Mono" pitchFamily="34" charset="-122"/>
+                <a:cs typeface="IBM Plex Mono" pitchFamily="34" charset="-120"/>
+              </a:rPr>
+              <a:t>    total = total + v</a:t>
+            </a:r>
+            <a:endParaRPr lang="en-US" sz="1500" dirty="0"/>
+          </a:p>
+          <a:p>
+            <a:pPr indent="0" marL="0">
+              <a:lnSpc>
+                <a:spcPct val="125000"/>
+              </a:lnSpc>
+              <a:buNone/>
+            </a:pPr>
+            <a:r>
+              <a:rPr lang="en-US" sz="1500" dirty="0">
+                <a:solidFill>
+                  <a:srgbClr val="101828"/>
+                </a:solidFill>
+                <a:latin typeface="IBM Plex Mono" pitchFamily="34" charset="0"/>
+                <a:ea typeface="IBM Plex Mono" pitchFamily="34" charset="-122"/>
+                <a:cs typeface="IBM Plex Mono" pitchFamily="34" charset="-120"/>
+              </a:rPr>
+              <a:t>print(total)</a:t>
+            </a:r>
+            <a:endParaRPr lang="en-US" sz="1500" dirty="0"/>
+          </a:p>
+          <a:p>
+            <a:pPr indent="0" marL="0">
+              <a:lnSpc>
+                <a:spcPct val="125000"/>
+              </a:lnSpc>
+              <a:buNone/>
+            </a:pPr>
+            <a:r>
+              <a:rPr lang="en-US" sz="1500" dirty="0">
+                <a:solidFill>
+                  <a:srgbClr val="101828"/>
+                </a:solidFill>
+                <a:latin typeface="IBM Plex Mono" pitchFamily="34" charset="0"/>
+                <a:ea typeface="IBM Plex Mono" pitchFamily="34" charset="-122"/>
+                <a:cs typeface="IBM Plex Mono" pitchFamily="34" charset="-120"/>
+              </a:rPr>
+              <a:t>print(len(grid[0]))</a:t>
+            </a:r>
+            <a:endParaRPr lang="en-US" sz="1500" dirty="0"/>
+          </a:p>
+        </p:txBody>
+      </p:sp>
+      <p:sp>
+        <p:nvSpPr>
+          <p:cNvPr id="11" name="Shape 9"/>
+          <p:cNvSpPr/>
+          <p:nvPr/>
+        </p:nvSpPr>
+        <p:spPr>
+          <a:xfrm>
+            <a:off x="5806440" y="2148840"/>
+            <a:ext cx="5852160" cy="731520"/>
+          </a:xfrm>
+          <a:prstGeom prst="roundRect">
+            <a:avLst>
+              <a:gd name="adj" fmla="val 15000"/>
+            </a:avLst>
+          </a:prstGeom>
+          <a:solidFill>
+            <a:srgbClr val="FFFFFF"/>
+          </a:solidFill>
+          <a:ln w="15875">
+            <a:solidFill>
+              <a:srgbClr val="D9DEE7"/>
+            </a:solidFill>
+            <a:prstDash val="solid"/>
+          </a:ln>
+        </p:spPr>
+      </p:sp>
+      <p:sp>
+        <p:nvSpPr>
+          <p:cNvPr id="12" name="Shape 10"/>
+          <p:cNvSpPr/>
+          <p:nvPr/>
+        </p:nvSpPr>
+        <p:spPr>
+          <a:xfrm>
+            <a:off x="6080760" y="2295144"/>
+            <a:ext cx="438912" cy="438912"/>
+          </a:xfrm>
+          <a:prstGeom prst="roundRect">
+            <a:avLst>
+              <a:gd name="adj" fmla="val 20833"/>
+            </a:avLst>
+          </a:prstGeom>
+          <a:solidFill>
+            <a:srgbClr val="EEF2FB"/>
+          </a:solidFill>
+          <a:ln/>
+        </p:spPr>
+      </p:sp>
+      <p:sp>
+        <p:nvSpPr>
+          <p:cNvPr id="13" name="Text 11"/>
+          <p:cNvSpPr txBox="1"/>
+          <p:nvPr/>
+        </p:nvSpPr>
+        <p:spPr>
+          <a:xfrm>
+            <a:off x="6080760" y="2295144"/>
+            <a:ext cx="438912" cy="438912"/>
+          </a:xfrm>
+          <a:prstGeom prst="rect">
+            <a:avLst/>
+          </a:prstGeom>
+          <a:noFill/>
+          <a:ln/>
+        </p:spPr>
+        <p:txBody>
+          <a:bodyPr wrap="square" lIns="0" tIns="0" rIns="0" bIns="0" rtlCol="0" anchor="ctr"/>
+          <a:lstStyle/>
+          <a:p>
+            <a:pPr algn="ctr" indent="0" marL="0">
+              <a:buNone/>
+            </a:pPr>
+            <a:r>
+              <a:rPr lang="en-US" sz="1300" b="1" dirty="0">
+                <a:solidFill>
+                  <a:srgbClr val="2D63FF"/>
+                </a:solidFill>
+                <a:latin typeface="IBM Plex Mono" pitchFamily="34" charset="0"/>
+                <a:ea typeface="IBM Plex Mono" pitchFamily="34" charset="-122"/>
+                <a:cs typeface="IBM Plex Mono" pitchFamily="34" charset="-120"/>
+              </a:rPr>
+              <a:t>A</a:t>
+            </a:r>
+            <a:endParaRPr lang="en-US" sz="1300" dirty="0"/>
+          </a:p>
+        </p:txBody>
+      </p:sp>
+      <p:sp>
+        <p:nvSpPr>
+          <p:cNvPr id="14" name="Text 12"/>
+          <p:cNvSpPr txBox="1"/>
+          <p:nvPr/>
+        </p:nvSpPr>
+        <p:spPr>
+          <a:xfrm>
+            <a:off x="6720840" y="2148840"/>
+            <a:ext cx="4754880" cy="731520"/>
+          </a:xfrm>
+          <a:prstGeom prst="rect">
+            <a:avLst/>
+          </a:prstGeom>
+          <a:noFill/>
+          <a:ln/>
+        </p:spPr>
+        <p:txBody>
+          <a:bodyPr wrap="square" lIns="0" tIns="0" rIns="0" bIns="0" rtlCol="0" anchor="ctr"/>
+          <a:lstStyle/>
+          <a:p>
+            <a:pPr indent="0" marL="0">
+              <a:lnSpc>
+                <a:spcPct val="115000"/>
+              </a:lnSpc>
+              <a:buNone/>
+            </a:pPr>
+            <a:r>
+              <a:rPr lang="en-US" sz="1700" dirty="0">
                 <a:solidFill>
                   <a:srgbClr val="101828"/>
                 </a:solidFill>
@@ -3104,48 +3492,329 @@
                 <a:ea typeface="IBM Plex Sans" pitchFamily="34" charset="-122"/>
                 <a:cs typeface="IBM Plex Sans" pitchFamily="34" charset="-120"/>
               </a:rPr>
-              <a:t>A variable called grid holds [[4, 7, 2], [5, 1, 9]]. Tap the star and match each piece of Python to what it gives back.</a:t>
-            </a:r>
-            <a:endParaRPr lang="en-US" sz="2200" dirty="0"/>
-          </a:p>
-        </p:txBody>
-      </p:sp>
-      <p:sp>
-        <p:nvSpPr>
-          <p:cNvPr id="10" name="Text 8"/>
-          <p:cNvSpPr txBox="1"/>
-          <p:nvPr/>
-        </p:nvSpPr>
-        <p:spPr>
-          <a:xfrm>
-            <a:off x="502920" y="4526280"/>
-            <a:ext cx="11155680" cy="457200"/>
-          </a:xfrm>
-          <a:prstGeom prst="rect">
-            <a:avLst/>
-          </a:prstGeom>
-          <a:noFill/>
-          <a:ln/>
-        </p:spPr>
-        <p:txBody>
-          <a:bodyPr wrap="square" lIns="0" tIns="0" rIns="0" bIns="0" rtlCol="0" anchor="ctr"/>
-          <a:lstStyle/>
-          <a:p>
-            <a:pPr indent="0" marL="0">
-              <a:buNone/>
-            </a:pPr>
-            <a:r>
-              <a:rPr lang="en-US" sz="1600" dirty="0">
-                <a:solidFill>
-                  <a:srgbClr val="667085"/>
+              <a:t>15</a:t>
+            </a:r>
+            <a:endParaRPr lang="en-US" sz="1700" dirty="0"/>
+          </a:p>
+          <a:p>
+            <a:pPr indent="0" marL="0">
+              <a:lnSpc>
+                <a:spcPct val="115000"/>
+              </a:lnSpc>
+              <a:buNone/>
+            </a:pPr>
+            <a:r>
+              <a:rPr lang="en-US" sz="1700" dirty="0">
+                <a:solidFill>
+                  <a:srgbClr val="101828"/>
                 </a:solidFill>
                 <a:latin typeface="IBM Plex Sans" pitchFamily="34" charset="0"/>
                 <a:ea typeface="IBM Plex Sans" pitchFamily="34" charset="-122"/>
                 <a:cs typeface="IBM Plex Sans" pitchFamily="34" charset="-120"/>
               </a:rPr>
-              <a:t>Predict on paper first, then look down and test it.</a:t>
-            </a:r>
-            <a:endParaRPr lang="en-US" sz="1600" dirty="0"/>
+              <a:t>2</a:t>
+            </a:r>
+            <a:endParaRPr lang="en-US" sz="1700" dirty="0"/>
+          </a:p>
+        </p:txBody>
+      </p:sp>
+      <p:sp>
+        <p:nvSpPr>
+          <p:cNvPr id="15" name="Shape 13"/>
+          <p:cNvSpPr/>
+          <p:nvPr/>
+        </p:nvSpPr>
+        <p:spPr>
+          <a:xfrm>
+            <a:off x="5806440" y="3017520"/>
+            <a:ext cx="5852160" cy="731520"/>
+          </a:xfrm>
+          <a:prstGeom prst="roundRect">
+            <a:avLst>
+              <a:gd name="adj" fmla="val 15000"/>
+            </a:avLst>
+          </a:prstGeom>
+          <a:solidFill>
+            <a:srgbClr val="FFFFFF"/>
+          </a:solidFill>
+          <a:ln w="15875">
+            <a:solidFill>
+              <a:srgbClr val="D9DEE7"/>
+            </a:solidFill>
+            <a:prstDash val="solid"/>
+          </a:ln>
+        </p:spPr>
+      </p:sp>
+      <p:sp>
+        <p:nvSpPr>
+          <p:cNvPr id="16" name="Shape 14"/>
+          <p:cNvSpPr/>
+          <p:nvPr/>
+        </p:nvSpPr>
+        <p:spPr>
+          <a:xfrm>
+            <a:off x="6080760" y="3163824"/>
+            <a:ext cx="438912" cy="438912"/>
+          </a:xfrm>
+          <a:prstGeom prst="roundRect">
+            <a:avLst>
+              <a:gd name="adj" fmla="val 20833"/>
+            </a:avLst>
+          </a:prstGeom>
+          <a:solidFill>
+            <a:srgbClr val="EEF2FB"/>
+          </a:solidFill>
+          <a:ln/>
+        </p:spPr>
+      </p:sp>
+      <p:sp>
+        <p:nvSpPr>
+          <p:cNvPr id="17" name="Text 15"/>
+          <p:cNvSpPr txBox="1"/>
+          <p:nvPr/>
+        </p:nvSpPr>
+        <p:spPr>
+          <a:xfrm>
+            <a:off x="6080760" y="3163824"/>
+            <a:ext cx="438912" cy="438912"/>
+          </a:xfrm>
+          <a:prstGeom prst="rect">
+            <a:avLst/>
+          </a:prstGeom>
+          <a:noFill/>
+          <a:ln/>
+        </p:spPr>
+        <p:txBody>
+          <a:bodyPr wrap="square" lIns="0" tIns="0" rIns="0" bIns="0" rtlCol="0" anchor="ctr"/>
+          <a:lstStyle/>
+          <a:p>
+            <a:pPr algn="ctr" indent="0" marL="0">
+              <a:buNone/>
+            </a:pPr>
+            <a:r>
+              <a:rPr lang="en-US" sz="1300" b="1" dirty="0">
+                <a:solidFill>
+                  <a:srgbClr val="2D63FF"/>
+                </a:solidFill>
+                <a:latin typeface="IBM Plex Mono" pitchFamily="34" charset="0"/>
+                <a:ea typeface="IBM Plex Mono" pitchFamily="34" charset="-122"/>
+                <a:cs typeface="IBM Plex Mono" pitchFamily="34" charset="-120"/>
+              </a:rPr>
+              <a:t>B</a:t>
+            </a:r>
+            <a:endParaRPr lang="en-US" sz="1300" dirty="0"/>
+          </a:p>
+        </p:txBody>
+      </p:sp>
+      <p:sp>
+        <p:nvSpPr>
+          <p:cNvPr id="18" name="Text 16"/>
+          <p:cNvSpPr txBox="1"/>
+          <p:nvPr/>
+        </p:nvSpPr>
+        <p:spPr>
+          <a:xfrm>
+            <a:off x="6720840" y="3017520"/>
+            <a:ext cx="4754880" cy="731520"/>
+          </a:xfrm>
+          <a:prstGeom prst="rect">
+            <a:avLst/>
+          </a:prstGeom>
+          <a:noFill/>
+          <a:ln/>
+        </p:spPr>
+        <p:txBody>
+          <a:bodyPr wrap="square" lIns="0" tIns="0" rIns="0" bIns="0" rtlCol="0" anchor="ctr"/>
+          <a:lstStyle/>
+          <a:p>
+            <a:pPr indent="0" marL="0">
+              <a:lnSpc>
+                <a:spcPct val="115000"/>
+              </a:lnSpc>
+              <a:buNone/>
+            </a:pPr>
+            <a:r>
+              <a:rPr lang="en-US" sz="1700" dirty="0">
+                <a:solidFill>
+                  <a:srgbClr val="101828"/>
+                </a:solidFill>
+                <a:latin typeface="IBM Plex Sans" pitchFamily="34" charset="0"/>
+                <a:ea typeface="IBM Plex Sans" pitchFamily="34" charset="-122"/>
+                <a:cs typeface="IBM Plex Sans" pitchFamily="34" charset="-120"/>
+              </a:rPr>
+              <a:t>15</a:t>
+            </a:r>
+            <a:endParaRPr lang="en-US" sz="1700" dirty="0"/>
+          </a:p>
+          <a:p>
+            <a:pPr indent="0" marL="0">
+              <a:lnSpc>
+                <a:spcPct val="115000"/>
+              </a:lnSpc>
+              <a:buNone/>
+            </a:pPr>
+            <a:r>
+              <a:rPr lang="en-US" sz="1700" dirty="0">
+                <a:solidFill>
+                  <a:srgbClr val="101828"/>
+                </a:solidFill>
+                <a:latin typeface="IBM Plex Sans" pitchFamily="34" charset="0"/>
+                <a:ea typeface="IBM Plex Sans" pitchFamily="34" charset="-122"/>
+                <a:cs typeface="IBM Plex Sans" pitchFamily="34" charset="-120"/>
+              </a:rPr>
+              <a:t>3</a:t>
+            </a:r>
+            <a:endParaRPr lang="en-US" sz="1700" dirty="0"/>
+          </a:p>
+        </p:txBody>
+      </p:sp>
+      <p:sp>
+        <p:nvSpPr>
+          <p:cNvPr id="19" name="Shape 17"/>
+          <p:cNvSpPr/>
+          <p:nvPr/>
+        </p:nvSpPr>
+        <p:spPr>
+          <a:xfrm>
+            <a:off x="5806440" y="3886200"/>
+            <a:ext cx="5852160" cy="731520"/>
+          </a:xfrm>
+          <a:prstGeom prst="roundRect">
+            <a:avLst>
+              <a:gd name="adj" fmla="val 15000"/>
+            </a:avLst>
+          </a:prstGeom>
+          <a:solidFill>
+            <a:srgbClr val="FFFFFF"/>
+          </a:solidFill>
+          <a:ln w="15875">
+            <a:solidFill>
+              <a:srgbClr val="D9DEE7"/>
+            </a:solidFill>
+            <a:prstDash val="solid"/>
+          </a:ln>
+        </p:spPr>
+      </p:sp>
+      <p:sp>
+        <p:nvSpPr>
+          <p:cNvPr id="20" name="Shape 18"/>
+          <p:cNvSpPr/>
+          <p:nvPr/>
+        </p:nvSpPr>
+        <p:spPr>
+          <a:xfrm>
+            <a:off x="6080760" y="4032504"/>
+            <a:ext cx="438912" cy="438912"/>
+          </a:xfrm>
+          <a:prstGeom prst="roundRect">
+            <a:avLst>
+              <a:gd name="adj" fmla="val 20833"/>
+            </a:avLst>
+          </a:prstGeom>
+          <a:solidFill>
+            <a:srgbClr val="EEF2FB"/>
+          </a:solidFill>
+          <a:ln/>
+        </p:spPr>
+      </p:sp>
+      <p:sp>
+        <p:nvSpPr>
+          <p:cNvPr id="21" name="Text 19"/>
+          <p:cNvSpPr txBox="1"/>
+          <p:nvPr/>
+        </p:nvSpPr>
+        <p:spPr>
+          <a:xfrm>
+            <a:off x="6080760" y="4032504"/>
+            <a:ext cx="438912" cy="438912"/>
+          </a:xfrm>
+          <a:prstGeom prst="rect">
+            <a:avLst/>
+          </a:prstGeom>
+          <a:noFill/>
+          <a:ln/>
+        </p:spPr>
+        <p:txBody>
+          <a:bodyPr wrap="square" lIns="0" tIns="0" rIns="0" bIns="0" rtlCol="0" anchor="ctr"/>
+          <a:lstStyle/>
+          <a:p>
+            <a:pPr algn="ctr" indent="0" marL="0">
+              <a:buNone/>
+            </a:pPr>
+            <a:r>
+              <a:rPr lang="en-US" sz="1300" b="1" dirty="0">
+                <a:solidFill>
+                  <a:srgbClr val="2D63FF"/>
+                </a:solidFill>
+                <a:latin typeface="IBM Plex Mono" pitchFamily="34" charset="0"/>
+                <a:ea typeface="IBM Plex Mono" pitchFamily="34" charset="-122"/>
+                <a:cs typeface="IBM Plex Mono" pitchFamily="34" charset="-120"/>
+              </a:rPr>
+              <a:t>C</a:t>
+            </a:r>
+            <a:endParaRPr lang="en-US" sz="1300" dirty="0"/>
+          </a:p>
+        </p:txBody>
+      </p:sp>
+      <p:sp>
+        <p:nvSpPr>
+          <p:cNvPr id="22" name="Text 20"/>
+          <p:cNvSpPr txBox="1"/>
+          <p:nvPr/>
+        </p:nvSpPr>
+        <p:spPr>
+          <a:xfrm>
+            <a:off x="6720840" y="3886200"/>
+            <a:ext cx="4754880" cy="731520"/>
+          </a:xfrm>
+          <a:prstGeom prst="rect">
+            <a:avLst/>
+          </a:prstGeom>
+          <a:noFill/>
+          <a:ln/>
+        </p:spPr>
+        <p:txBody>
+          <a:bodyPr wrap="square" lIns="0" tIns="0" rIns="0" bIns="0" rtlCol="0" anchor="ctr"/>
+          <a:lstStyle/>
+          <a:p>
+            <a:pPr indent="0" marL="0">
+              <a:lnSpc>
+                <a:spcPct val="115000"/>
+              </a:lnSpc>
+              <a:buNone/>
+            </a:pPr>
+            <a:r>
+              <a:rPr lang="en-US" sz="1700" dirty="0">
+                <a:solidFill>
+                  <a:srgbClr val="101828"/>
+                </a:solidFill>
+                <a:latin typeface="IBM Plex Sans" pitchFamily="34" charset="0"/>
+                <a:ea typeface="IBM Plex Sans" pitchFamily="34" charset="-122"/>
+                <a:cs typeface="IBM Plex Sans" pitchFamily="34" charset="-120"/>
+              </a:rPr>
+              <a:t>16</a:t>
+            </a:r>
+            <a:endParaRPr lang="en-US" sz="1700" dirty="0"/>
+          </a:p>
+          <a:p>
+            <a:pPr indent="0" marL="0">
+              <a:lnSpc>
+                <a:spcPct val="115000"/>
+              </a:lnSpc>
+              <a:buNone/>
+            </a:pPr>
+            <a:r>
+              <a:rPr lang="en-US" sz="1700" dirty="0">
+                <a:solidFill>
+                  <a:srgbClr val="101828"/>
+                </a:solidFill>
+                <a:latin typeface="IBM Plex Sans" pitchFamily="34" charset="0"/>
+                <a:ea typeface="IBM Plex Sans" pitchFamily="34" charset="-122"/>
+                <a:cs typeface="IBM Plex Sans" pitchFamily="34" charset="-120"/>
+              </a:rPr>
+              <a:t>3</a:t>
+            </a:r>
+            <a:endParaRPr lang="en-US" sz="1700" dirty="0"/>
           </a:p>
         </p:txBody>
       </p:sp>
@@ -3281,30 +3950,91 @@
       </p:sp>
       <p:sp>
         <p:nvSpPr>
-          <p:cNvPr id="5" name="Text 3"/>
-          <p:cNvSpPr txBox="1"/>
-          <p:nvPr/>
-        </p:nvSpPr>
-        <p:spPr>
-          <a:xfrm>
-            <a:off x="502920" y="411480"/>
-            <a:ext cx="11155680" cy="777240"/>
-          </a:xfrm>
-          <a:prstGeom prst="rect">
-            <a:avLst/>
-          </a:prstGeom>
-          <a:noFill/>
-          <a:ln/>
-        </p:spPr>
-        <p:txBody>
-          <a:bodyPr wrap="square" lIns="0" tIns="0" rIns="0" bIns="0" rtlCol="0" anchor="ctr"/>
-          <a:lstStyle/>
-          <a:p>
-            <a:pPr indent="0" marL="0">
-              <a:buNone/>
-            </a:pPr>
-            <a:r>
-              <a:rPr lang="en-US" sz="3200" b="1" dirty="0">
+          <p:cNvPr id="5" name="Shape 3"/>
+          <p:cNvSpPr/>
+          <p:nvPr/>
+        </p:nvSpPr>
+        <p:spPr>
+          <a:xfrm>
+            <a:off x="502920" y="438912"/>
+            <a:ext cx="3108960" cy="502920"/>
+          </a:xfrm>
+          <a:prstGeom prst="roundRect">
+            <a:avLst>
+              <a:gd name="adj" fmla="val 18182"/>
+            </a:avLst>
+          </a:prstGeom>
+          <a:solidFill>
+            <a:srgbClr val="F4B942"/>
+          </a:solidFill>
+          <a:ln/>
+        </p:spPr>
+      </p:sp>
+      <p:sp>
+        <p:nvSpPr>
+          <p:cNvPr id="6" name="Text 4"/>
+          <p:cNvSpPr txBox="1"/>
+          <p:nvPr/>
+        </p:nvSpPr>
+        <p:spPr>
+          <a:xfrm>
+            <a:off x="502920" y="438912"/>
+            <a:ext cx="3108960" cy="502920"/>
+          </a:xfrm>
+          <a:prstGeom prst="rect">
+            <a:avLst/>
+          </a:prstGeom>
+          <a:noFill/>
+          <a:ln/>
+        </p:spPr>
+        <p:txBody>
+          <a:bodyPr wrap="square" lIns="0" tIns="0" rIns="0" bIns="0" rtlCol="0" anchor="ctr"/>
+          <a:lstStyle/>
+          <a:p>
+            <a:pPr algn="ctr" indent="0" marL="0">
+              <a:buNone/>
+            </a:pPr>
+            <a:r>
+              <a:rPr lang="en-US" sz="1300" b="1" dirty="0">
+                <a:solidFill>
+                  <a:srgbClr val="101828"/>
+                </a:solidFill>
+                <a:latin typeface="IBM Plex Mono" pitchFamily="34" charset="0"/>
+                <a:ea typeface="IBM Plex Mono" pitchFamily="34" charset="-122"/>
+                <a:cs typeface="IBM Plex Mono" pitchFamily="34" charset="-120"/>
+              </a:rPr>
+              <a:t>★  FINAL CHALLENGE</a:t>
+            </a:r>
+            <a:endParaRPr lang="en-US" sz="1300" dirty="0"/>
+          </a:p>
+        </p:txBody>
+      </p:sp>
+      <p:sp>
+        <p:nvSpPr>
+          <p:cNvPr id="7" name="Text 5"/>
+          <p:cNvSpPr txBox="1"/>
+          <p:nvPr/>
+        </p:nvSpPr>
+        <p:spPr>
+          <a:xfrm>
+            <a:off x="502920" y="1097280"/>
+            <a:ext cx="11155680" cy="731520"/>
+          </a:xfrm>
+          <a:prstGeom prst="rect">
+            <a:avLst/>
+          </a:prstGeom>
+          <a:noFill/>
+          <a:ln/>
+        </p:spPr>
+        <p:txBody>
+          <a:bodyPr wrap="square" lIns="0" tIns="0" rIns="0" bIns="0" rtlCol="0" anchor="ctr"/>
+          <a:lstStyle/>
+          <a:p>
+            <a:pPr indent="0" marL="0">
+              <a:buNone/>
+            </a:pPr>
+            <a:r>
+              <a:rPr lang="en-US" sz="3400" b="1" dirty="0">
                 <a:solidFill>
                   <a:srgbClr val="101828"/>
                 </a:solidFill>
@@ -3312,65 +4042,26 @@
                 <a:ea typeface="IBM Plex Sans" pitchFamily="34" charset="-122"/>
                 <a:cs typeface="IBM Plex Sans" pitchFamily="34" charset="-120"/>
               </a:rPr>
-              <a:t>Worth knowing</a:t>
-            </a:r>
-            <a:endParaRPr lang="en-US" sz="3200" dirty="0"/>
-          </a:p>
-        </p:txBody>
-      </p:sp>
-      <p:sp>
-        <p:nvSpPr>
-          <p:cNvPr id="6" name="Text 4"/>
-          <p:cNvSpPr txBox="1"/>
-          <p:nvPr/>
-        </p:nvSpPr>
-        <p:spPr>
-          <a:xfrm>
-            <a:off x="502920" y="1170432"/>
-            <a:ext cx="11155680" cy="411480"/>
-          </a:xfrm>
-          <a:prstGeom prst="rect">
-            <a:avLst/>
-          </a:prstGeom>
-          <a:noFill/>
-          <a:ln/>
-        </p:spPr>
-        <p:txBody>
-          <a:bodyPr wrap="square" lIns="0" tIns="0" rIns="0" bIns="0" rtlCol="0" anchor="ctr"/>
-          <a:lstStyle/>
-          <a:p>
-            <a:pPr indent="0" marL="0">
-              <a:buNone/>
-            </a:pPr>
-            <a:r>
-              <a:rPr lang="en-US" sz="1500" dirty="0">
-                <a:solidFill>
-                  <a:srgbClr val="667085"/>
-                </a:solidFill>
-                <a:latin typeface="IBM Plex Sans" pitchFamily="34" charset="0"/>
-                <a:ea typeface="IBM Plex Sans" pitchFamily="34" charset="-122"/>
-                <a:cs typeface="IBM Plex Sans" pitchFamily="34" charset="-120"/>
-              </a:rPr>
-              <a:t>The information markers dotted around the room</a:t>
-            </a:r>
-            <a:endParaRPr lang="en-US" sz="1500" dirty="0"/>
-          </a:p>
-        </p:txBody>
-      </p:sp>
-      <p:sp>
-        <p:nvSpPr>
-          <p:cNvPr id="7" name="Shape 5"/>
+              <a:t>Read the grid</a:t>
+            </a:r>
+            <a:endParaRPr lang="en-US" sz="3400" dirty="0"/>
+          </a:p>
+        </p:txBody>
+      </p:sp>
+      <p:sp>
+        <p:nvSpPr>
+          <p:cNvPr id="8" name="Shape 6"/>
           <p:cNvSpPr/>
           <p:nvPr/>
         </p:nvSpPr>
         <p:spPr>
           <a:xfrm>
-            <a:off x="502920" y="1828800"/>
-            <a:ext cx="5394960" cy="1737360"/>
+            <a:off x="502920" y="2011680"/>
+            <a:ext cx="11155680" cy="2194560"/>
           </a:xfrm>
           <a:prstGeom prst="roundRect">
             <a:avLst>
-              <a:gd name="adj" fmla="val 6316"/>
+              <a:gd name="adj" fmla="val 5000"/>
             </a:avLst>
           </a:prstGeom>
           <a:solidFill>
@@ -3386,72 +4077,72 @@
       </p:sp>
       <p:sp>
         <p:nvSpPr>
-          <p:cNvPr id="8" name="Text 6"/>
-          <p:cNvSpPr txBox="1"/>
-          <p:nvPr/>
-        </p:nvSpPr>
-        <p:spPr>
-          <a:xfrm>
-            <a:off x="822960" y="2011680"/>
-            <a:ext cx="4754880" cy="365760"/>
-          </a:xfrm>
-          <a:prstGeom prst="rect">
-            <a:avLst/>
-          </a:prstGeom>
-          <a:noFill/>
-          <a:ln/>
-        </p:spPr>
-        <p:txBody>
-          <a:bodyPr wrap="square" lIns="0" tIns="0" rIns="0" bIns="0" rtlCol="0" anchor="ctr"/>
-          <a:lstStyle/>
-          <a:p>
-            <a:pPr indent="0" marL="0">
-              <a:buNone/>
-            </a:pPr>
-            <a:r>
-              <a:rPr lang="en-US" sz="1600" b="1" dirty="0">
-                <a:solidFill>
-                  <a:srgbClr val="2D63FF"/>
+          <p:cNvPr id="9" name="Text 7"/>
+          <p:cNvSpPr txBox="1"/>
+          <p:nvPr/>
+        </p:nvSpPr>
+        <p:spPr>
+          <a:xfrm>
+            <a:off x="1005840" y="2331720"/>
+            <a:ext cx="10149840" cy="1554480"/>
+          </a:xfrm>
+          <a:prstGeom prst="rect">
+            <a:avLst/>
+          </a:prstGeom>
+          <a:noFill/>
+          <a:ln/>
+        </p:spPr>
+        <p:txBody>
+          <a:bodyPr wrap="square" lIns="0" tIns="0" rIns="0" bIns="0" rtlCol="0" anchor="ctr"/>
+          <a:lstStyle/>
+          <a:p>
+            <a:pPr indent="0" marL="0">
+              <a:lnSpc>
+                <a:spcPct val="130000"/>
+              </a:lnSpc>
+              <a:buNone/>
+            </a:pPr>
+            <a:r>
+              <a:rPr lang="en-US" sz="2200" dirty="0">
+                <a:solidFill>
+                  <a:srgbClr val="101828"/>
                 </a:solidFill>
                 <a:latin typeface="IBM Plex Sans" pitchFamily="34" charset="0"/>
                 <a:ea typeface="IBM Plex Sans" pitchFamily="34" charset="-122"/>
                 <a:cs typeface="IBM Plex Sans" pitchFamily="34" charset="-120"/>
               </a:rPr>
-              <a:t>Rows first</a:t>
-            </a:r>
-            <a:endParaRPr lang="en-US" sz="1600" dirty="0"/>
-          </a:p>
-        </p:txBody>
-      </p:sp>
-      <p:sp>
-        <p:nvSpPr>
-          <p:cNvPr id="9" name="Text 7"/>
-          <p:cNvSpPr txBox="1"/>
-          <p:nvPr/>
-        </p:nvSpPr>
-        <p:spPr>
-          <a:xfrm>
-            <a:off x="822960" y="2395728"/>
-            <a:ext cx="4754880" cy="1005840"/>
-          </a:xfrm>
-          <a:prstGeom prst="rect">
-            <a:avLst/>
-          </a:prstGeom>
-          <a:noFill/>
-          <a:ln/>
-        </p:spPr>
-        <p:txBody>
-          <a:bodyPr wrap="square" lIns="0" tIns="0" rIns="0" bIns="0" rtlCol="0" anchor="t"/>
-          <a:lstStyle/>
-          <a:p>
-            <a:pPr indent="0" marL="0">
-              <a:lnSpc>
-                <a:spcPct val="120000"/>
-              </a:lnSpc>
-              <a:buNone/>
-            </a:pPr>
-            <a:r>
-              <a:rPr lang="en-US" sz="1300" dirty="0">
+              <a:t>A variable called grid holds [[4, 7, 2], [5, 1, 9]]. Tap the star and match each piece of Python to what it gives back.</a:t>
+            </a:r>
+            <a:endParaRPr lang="en-US" sz="2200" dirty="0"/>
+          </a:p>
+        </p:txBody>
+      </p:sp>
+      <p:sp>
+        <p:nvSpPr>
+          <p:cNvPr id="10" name="Text 8"/>
+          <p:cNvSpPr txBox="1"/>
+          <p:nvPr/>
+        </p:nvSpPr>
+        <p:spPr>
+          <a:xfrm>
+            <a:off x="502920" y="4526280"/>
+            <a:ext cx="11155680" cy="457200"/>
+          </a:xfrm>
+          <a:prstGeom prst="rect">
+            <a:avLst/>
+          </a:prstGeom>
+          <a:noFill/>
+          <a:ln/>
+        </p:spPr>
+        <p:txBody>
+          <a:bodyPr wrap="square" lIns="0" tIns="0" rIns="0" bIns="0" rtlCol="0" anchor="ctr"/>
+          <a:lstStyle/>
+          <a:p>
+            <a:pPr indent="0" marL="0">
+              <a:buNone/>
+            </a:pPr>
+            <a:r>
+              <a:rPr lang="en-US" sz="1600" dirty="0">
                 <a:solidFill>
                   <a:srgbClr val="667085"/>
                 </a:solidFill>
@@ -3459,333 +4150,9 @@
                 <a:ea typeface="IBM Plex Sans" pitchFamily="34" charset="-122"/>
                 <a:cs typeface="IBM Plex Sans" pitchFamily="34" charset="-120"/>
               </a:rPr>
-              <a:t>A grid is described as rows by columns, so a 3 by 4 grid has 3 rows of 4 items each.</a:t>
-            </a:r>
-            <a:endParaRPr lang="en-US" sz="1300" dirty="0"/>
-          </a:p>
-        </p:txBody>
-      </p:sp>
-      <p:sp>
-        <p:nvSpPr>
-          <p:cNvPr id="10" name="Shape 8"/>
-          <p:cNvSpPr/>
-          <p:nvPr/>
-        </p:nvSpPr>
-        <p:spPr>
-          <a:xfrm>
-            <a:off x="6217920" y="1828800"/>
-            <a:ext cx="5394960" cy="1737360"/>
-          </a:xfrm>
-          <a:prstGeom prst="roundRect">
-            <a:avLst>
-              <a:gd name="adj" fmla="val 6316"/>
-            </a:avLst>
-          </a:prstGeom>
-          <a:solidFill>
-            <a:srgbClr val="FFFFFF"/>
-          </a:solidFill>
-          <a:ln w="15875">
-            <a:solidFill>
-              <a:srgbClr val="08A6A6"/>
-            </a:solidFill>
-            <a:prstDash val="solid"/>
-          </a:ln>
-        </p:spPr>
-      </p:sp>
-      <p:sp>
-        <p:nvSpPr>
-          <p:cNvPr id="11" name="Text 9"/>
-          <p:cNvSpPr txBox="1"/>
-          <p:nvPr/>
-        </p:nvSpPr>
-        <p:spPr>
-          <a:xfrm>
-            <a:off x="6537960" y="2011680"/>
-            <a:ext cx="4754880" cy="365760"/>
-          </a:xfrm>
-          <a:prstGeom prst="rect">
-            <a:avLst/>
-          </a:prstGeom>
-          <a:noFill/>
-          <a:ln/>
-        </p:spPr>
-        <p:txBody>
-          <a:bodyPr wrap="square" lIns="0" tIns="0" rIns="0" bIns="0" rtlCol="0" anchor="ctr"/>
-          <a:lstStyle/>
-          <a:p>
-            <a:pPr indent="0" marL="0">
-              <a:buNone/>
-            </a:pPr>
-            <a:r>
-              <a:rPr lang="en-US" sz="1600" b="1" dirty="0">
-                <a:solidFill>
-                  <a:srgbClr val="08A6A6"/>
-                </a:solidFill>
-                <a:latin typeface="IBM Plex Sans" pitchFamily="34" charset="0"/>
-                <a:ea typeface="IBM Plex Sans" pitchFamily="34" charset="-122"/>
-                <a:cs typeface="IBM Plex Sans" pitchFamily="34" charset="-120"/>
-              </a:rPr>
-              <a:t>Two notations</a:t>
+              <a:t>Predict on paper first, then look down and test it.</a:t>
             </a:r>
             <a:endParaRPr lang="en-US" sz="1600" dirty="0"/>
-          </a:p>
-        </p:txBody>
-      </p:sp>
-      <p:sp>
-        <p:nvSpPr>
-          <p:cNvPr id="12" name="Text 10"/>
-          <p:cNvSpPr txBox="1"/>
-          <p:nvPr/>
-        </p:nvSpPr>
-        <p:spPr>
-          <a:xfrm>
-            <a:off x="6537960" y="2395728"/>
-            <a:ext cx="4754880" cy="1005840"/>
-          </a:xfrm>
-          <a:prstGeom prst="rect">
-            <a:avLst/>
-          </a:prstGeom>
-          <a:noFill/>
-          <a:ln/>
-        </p:spPr>
-        <p:txBody>
-          <a:bodyPr wrap="square" lIns="0" tIns="0" rIns="0" bIns="0" rtlCol="0" anchor="t"/>
-          <a:lstStyle/>
-          <a:p>
-            <a:pPr indent="0" marL="0">
-              <a:lnSpc>
-                <a:spcPct val="120000"/>
-              </a:lnSpc>
-              <a:buNone/>
-            </a:pPr>
-            <a:r>
-              <a:rPr lang="en-US" sz="1300" dirty="0">
-                <a:solidFill>
-                  <a:srgbClr val="667085"/>
-                </a:solidFill>
-                <a:latin typeface="IBM Plex Sans" pitchFamily="34" charset="0"/>
-                <a:ea typeface="IBM Plex Sans" pitchFamily="34" charset="-122"/>
-                <a:cs typeface="IBM Plex Sans" pitchFamily="34" charset="-120"/>
-              </a:rPr>
-              <a:t>Pseudocode in the exam writes a cell as array[1,2]. Python writes the same cell as grid[1][2].</a:t>
-            </a:r>
-            <a:endParaRPr lang="en-US" sz="1300" dirty="0"/>
-          </a:p>
-        </p:txBody>
-      </p:sp>
-      <p:sp>
-        <p:nvSpPr>
-          <p:cNvPr id="13" name="Shape 11"/>
-          <p:cNvSpPr/>
-          <p:nvPr/>
-        </p:nvSpPr>
-        <p:spPr>
-          <a:xfrm>
-            <a:off x="502920" y="3794760"/>
-            <a:ext cx="5394960" cy="1737360"/>
-          </a:xfrm>
-          <a:prstGeom prst="roundRect">
-            <a:avLst>
-              <a:gd name="adj" fmla="val 6316"/>
-            </a:avLst>
-          </a:prstGeom>
-          <a:solidFill>
-            <a:srgbClr val="FFFFFF"/>
-          </a:solidFill>
-          <a:ln w="15875">
-            <a:solidFill>
-              <a:srgbClr val="2D63FF"/>
-            </a:solidFill>
-            <a:prstDash val="solid"/>
-          </a:ln>
-        </p:spPr>
-      </p:sp>
-      <p:sp>
-        <p:nvSpPr>
-          <p:cNvPr id="14" name="Text 12"/>
-          <p:cNvSpPr txBox="1"/>
-          <p:nvPr/>
-        </p:nvSpPr>
-        <p:spPr>
-          <a:xfrm>
-            <a:off x="822960" y="3977640"/>
-            <a:ext cx="4754880" cy="365760"/>
-          </a:xfrm>
-          <a:prstGeom prst="rect">
-            <a:avLst/>
-          </a:prstGeom>
-          <a:noFill/>
-          <a:ln/>
-        </p:spPr>
-        <p:txBody>
-          <a:bodyPr wrap="square" lIns="0" tIns="0" rIns="0" bIns="0" rtlCol="0" anchor="ctr"/>
-          <a:lstStyle/>
-          <a:p>
-            <a:pPr indent="0" marL="0">
-              <a:buNone/>
-            </a:pPr>
-            <a:r>
-              <a:rPr lang="en-US" sz="1600" b="1" dirty="0">
-                <a:solidFill>
-                  <a:srgbClr val="2D63FF"/>
-                </a:solidFill>
-                <a:latin typeface="IBM Plex Sans" pitchFamily="34" charset="0"/>
-                <a:ea typeface="IBM Plex Sans" pitchFamily="34" charset="-122"/>
-                <a:cs typeface="IBM Plex Sans" pitchFamily="34" charset="-120"/>
-              </a:rPr>
-              <a:t>One long line</a:t>
-            </a:r>
-            <a:endParaRPr lang="en-US" sz="1600" dirty="0"/>
-          </a:p>
-        </p:txBody>
-      </p:sp>
-      <p:sp>
-        <p:nvSpPr>
-          <p:cNvPr id="15" name="Text 13"/>
-          <p:cNvSpPr txBox="1"/>
-          <p:nvPr/>
-        </p:nvSpPr>
-        <p:spPr>
-          <a:xfrm>
-            <a:off x="822960" y="4361688"/>
-            <a:ext cx="4754880" cy="1005840"/>
-          </a:xfrm>
-          <a:prstGeom prst="rect">
-            <a:avLst/>
-          </a:prstGeom>
-          <a:noFill/>
-          <a:ln/>
-        </p:spPr>
-        <p:txBody>
-          <a:bodyPr wrap="square" lIns="0" tIns="0" rIns="0" bIns="0" rtlCol="0" anchor="t"/>
-          <a:lstStyle/>
-          <a:p>
-            <a:pPr indent="0" marL="0">
-              <a:lnSpc>
-                <a:spcPct val="120000"/>
-              </a:lnSpc>
-              <a:buNone/>
-            </a:pPr>
-            <a:r>
-              <a:rPr lang="en-US" sz="1300" dirty="0">
-                <a:solidFill>
-                  <a:srgbClr val="667085"/>
-                </a:solidFill>
-                <a:latin typeface="IBM Plex Sans" pitchFamily="34" charset="0"/>
-                <a:ea typeface="IBM Plex Sans" pitchFamily="34" charset="-122"/>
-                <a:cs typeface="IBM Plex Sans" pitchFamily="34" charset="-120"/>
-              </a:rPr>
-              <a:t>Memory is one long line of addresses, so a grid is stored row after row. Reading along a row is the natural direction.</a:t>
-            </a:r>
-            <a:endParaRPr lang="en-US" sz="1300" dirty="0"/>
-          </a:p>
-        </p:txBody>
-      </p:sp>
-      <p:sp>
-        <p:nvSpPr>
-          <p:cNvPr id="16" name="Shape 14"/>
-          <p:cNvSpPr/>
-          <p:nvPr/>
-        </p:nvSpPr>
-        <p:spPr>
-          <a:xfrm>
-            <a:off x="6217920" y="3794760"/>
-            <a:ext cx="5394960" cy="1737360"/>
-          </a:xfrm>
-          <a:prstGeom prst="roundRect">
-            <a:avLst>
-              <a:gd name="adj" fmla="val 6316"/>
-            </a:avLst>
-          </a:prstGeom>
-          <a:solidFill>
-            <a:srgbClr val="FFFFFF"/>
-          </a:solidFill>
-          <a:ln w="15875">
-            <a:solidFill>
-              <a:srgbClr val="08A6A6"/>
-            </a:solidFill>
-            <a:prstDash val="solid"/>
-          </a:ln>
-        </p:spPr>
-      </p:sp>
-      <p:sp>
-        <p:nvSpPr>
-          <p:cNvPr id="17" name="Text 15"/>
-          <p:cNvSpPr txBox="1"/>
-          <p:nvPr/>
-        </p:nvSpPr>
-        <p:spPr>
-          <a:xfrm>
-            <a:off x="6537960" y="3977640"/>
-            <a:ext cx="4754880" cy="365760"/>
-          </a:xfrm>
-          <a:prstGeom prst="rect">
-            <a:avLst/>
-          </a:prstGeom>
-          <a:noFill/>
-          <a:ln/>
-        </p:spPr>
-        <p:txBody>
-          <a:bodyPr wrap="square" lIns="0" tIns="0" rIns="0" bIns="0" rtlCol="0" anchor="ctr"/>
-          <a:lstStyle/>
-          <a:p>
-            <a:pPr indent="0" marL="0">
-              <a:buNone/>
-            </a:pPr>
-            <a:r>
-              <a:rPr lang="en-US" sz="1600" b="1" dirty="0">
-                <a:solidFill>
-                  <a:srgbClr val="08A6A6"/>
-                </a:solidFill>
-                <a:latin typeface="IBM Plex Sans" pitchFamily="34" charset="0"/>
-                <a:ea typeface="IBM Plex Sans" pitchFamily="34" charset="-122"/>
-                <a:cs typeface="IBM Plex Sans" pitchFamily="34" charset="-120"/>
-              </a:rPr>
-              <a:t>sum() a row</a:t>
-            </a:r>
-            <a:endParaRPr lang="en-US" sz="1600" dirty="0"/>
-          </a:p>
-        </p:txBody>
-      </p:sp>
-      <p:sp>
-        <p:nvSpPr>
-          <p:cNvPr id="18" name="Text 16"/>
-          <p:cNvSpPr txBox="1"/>
-          <p:nvPr/>
-        </p:nvSpPr>
-        <p:spPr>
-          <a:xfrm>
-            <a:off x="6537960" y="4361688"/>
-            <a:ext cx="4754880" cy="1005840"/>
-          </a:xfrm>
-          <a:prstGeom prst="rect">
-            <a:avLst/>
-          </a:prstGeom>
-          <a:noFill/>
-          <a:ln/>
-        </p:spPr>
-        <p:txBody>
-          <a:bodyPr wrap="square" lIns="0" tIns="0" rIns="0" bIns="0" rtlCol="0" anchor="t"/>
-          <a:lstStyle/>
-          <a:p>
-            <a:pPr indent="0" marL="0">
-              <a:lnSpc>
-                <a:spcPct val="120000"/>
-              </a:lnSpc>
-              <a:buNone/>
-            </a:pPr>
-            <a:r>
-              <a:rPr lang="en-US" sz="1300" dirty="0">
-                <a:solidFill>
-                  <a:srgbClr val="667085"/>
-                </a:solidFill>
-                <a:latin typeface="IBM Plex Sans" pitchFamily="34" charset="0"/>
-                <a:ea typeface="IBM Plex Sans" pitchFamily="34" charset="-122"/>
-                <a:cs typeface="IBM Plex Sans" pitchFamily="34" charset="-120"/>
-              </a:rPr>
-              <a:t>sum() totals a list, so sum(grid[0]) totals a whole row in one step - but a column still needs a loop.</a:t>
-            </a:r>
-            <a:endParaRPr lang="en-US" sz="1300" dirty="0"/>
           </a:p>
         </p:txBody>
       </p:sp>
@@ -3952,7 +4319,7 @@
                 <a:ea typeface="IBM Plex Sans" pitchFamily="34" charset="-122"/>
                 <a:cs typeface="IBM Plex Sans" pitchFamily="34" charset="-120"/>
               </a:rPr>
-              <a:t>Exam practice</a:t>
+              <a:t>Worth knowing</a:t>
             </a:r>
             <a:endParaRPr lang="en-US" sz="3200" dirty="0"/>
           </a:p>
@@ -3991,7 +4358,7 @@
                 <a:ea typeface="IBM Plex Sans" pitchFamily="34" charset="-122"/>
                 <a:cs typeface="IBM Plex Sans" pitchFamily="34" charset="-120"/>
               </a:rPr>
-              <a:t>Devices away. Answer from memory on the worksheet.</a:t>
+              <a:t>The information markers dotted around the room</a:t>
             </a:r>
             <a:endParaRPr lang="en-US" sz="1500" dirty="0"/>
           </a:p>
@@ -4006,11 +4373,11 @@
         <p:spPr>
           <a:xfrm>
             <a:off x="502920" y="1828800"/>
-            <a:ext cx="11155680" cy="1097280"/>
+            <a:ext cx="5394960" cy="1737360"/>
           </a:xfrm>
           <a:prstGeom prst="roundRect">
             <a:avLst>
-              <a:gd name="adj" fmla="val 10000"/>
+              <a:gd name="adj" fmla="val 6316"/>
             </a:avLst>
           </a:prstGeom>
           <a:solidFill>
@@ -4018,7 +4385,7 @@
           </a:solidFill>
           <a:ln w="15875">
             <a:solidFill>
-              <a:srgbClr val="D9DEE7"/>
+              <a:srgbClr val="2D63FF"/>
             </a:solidFill>
             <a:prstDash val="solid"/>
           </a:ln>
@@ -4032,404 +4399,93 @@
         </p:nvSpPr>
         <p:spPr>
           <a:xfrm>
-            <a:off x="914400" y="1938528"/>
-            <a:ext cx="9418320" cy="877824"/>
-          </a:xfrm>
-          <a:prstGeom prst="rect">
-            <a:avLst/>
-          </a:prstGeom>
-          <a:noFill/>
-          <a:ln/>
-        </p:spPr>
-        <p:txBody>
-          <a:bodyPr wrap="square" lIns="0" tIns="0" rIns="0" bIns="0" rtlCol="0" anchor="ctr"/>
-          <a:lstStyle/>
-          <a:p>
-            <a:pPr indent="0" marL="0">
-              <a:lnSpc>
-                <a:spcPct val="118000"/>
-              </a:lnSpc>
-              <a:buNone/>
-            </a:pPr>
-            <a:r>
-              <a:rPr lang="en-US" sz="1700" dirty="0">
-                <a:solidFill>
-                  <a:srgbClr val="101828"/>
+            <a:off x="822960" y="2011680"/>
+            <a:ext cx="4754880" cy="365760"/>
+          </a:xfrm>
+          <a:prstGeom prst="rect">
+            <a:avLst/>
+          </a:prstGeom>
+          <a:noFill/>
+          <a:ln/>
+        </p:spPr>
+        <p:txBody>
+          <a:bodyPr wrap="square" lIns="0" tIns="0" rIns="0" bIns="0" rtlCol="0" anchor="ctr"/>
+          <a:lstStyle/>
+          <a:p>
+            <a:pPr indent="0" marL="0">
+              <a:buNone/>
+            </a:pPr>
+            <a:r>
+              <a:rPr lang="en-US" sz="1600" b="1" dirty="0">
+                <a:solidFill>
+                  <a:srgbClr val="2D63FF"/>
                 </a:solidFill>
                 <a:latin typeface="IBM Plex Sans" pitchFamily="34" charset="0"/>
                 <a:ea typeface="IBM Plex Sans" pitchFamily="34" charset="-122"/>
                 <a:cs typeface="IBM Plex Sans" pitchFamily="34" charset="-120"/>
               </a:rPr>
-              <a:t>A program that should total column 2 of a grid of 4 rows by 3 columns begins its loop with </a:t>
-            </a:r>
+              <a:t>Rows first</a:t>
+            </a:r>
+            <a:endParaRPr lang="en-US" sz="1600" dirty="0"/>
+          </a:p>
+        </p:txBody>
+      </p:sp>
+      <p:sp>
+        <p:nvSpPr>
+          <p:cNvPr id="9" name="Text 7"/>
+          <p:cNvSpPr txBox="1"/>
+          <p:nvPr/>
+        </p:nvSpPr>
+        <p:spPr>
+          <a:xfrm>
+            <a:off x="822960" y="2395728"/>
+            <a:ext cx="4754880" cy="1005840"/>
+          </a:xfrm>
+          <a:prstGeom prst="rect">
+            <a:avLst/>
+          </a:prstGeom>
+          <a:noFill/>
+          <a:ln/>
+        </p:spPr>
+        <p:txBody>
+          <a:bodyPr wrap="square" lIns="0" tIns="0" rIns="0" bIns="0" rtlCol="0" anchor="t"/>
+          <a:lstStyle/>
+          <a:p>
             <a:pPr indent="0" marL="0">
               <a:lnSpc>
-                <a:spcPct val="118000"/>
+                <a:spcPct val="120000"/>
               </a:lnSpc>
               <a:buNone/>
             </a:pPr>
             <a:r>
-              <a:rPr lang="en-US" sz="1700" dirty="0">
-                <a:solidFill>
-                  <a:srgbClr val="6B21A8"/>
-                </a:solidFill>
-                <a:latin typeface="IBM Plex Mono" pitchFamily="34" charset="0"/>
-                <a:ea typeface="IBM Plex Mono" pitchFamily="34" charset="-122"/>
-                <a:cs typeface="IBM Plex Mono" pitchFamily="34" charset="-120"/>
-              </a:rPr>
-              <a:t>for</a:t>
-            </a:r>
-            <a:pPr indent="0" marL="0">
-              <a:lnSpc>
-                <a:spcPct val="118000"/>
-              </a:lnSpc>
-              <a:buNone/>
-            </a:pPr>
-            <a:r>
-              <a:rPr lang="en-US" sz="1700" dirty="0">
-                <a:solidFill>
-                  <a:srgbClr val="18181B"/>
-                </a:solidFill>
-                <a:latin typeface="IBM Plex Mono" pitchFamily="34" charset="0"/>
-                <a:ea typeface="IBM Plex Mono" pitchFamily="34" charset="-122"/>
-                <a:cs typeface="IBM Plex Mono" pitchFamily="34" charset="-120"/>
-              </a:rPr>
-              <a:t> </a:t>
-            </a:r>
-            <a:pPr indent="0" marL="0">
-              <a:lnSpc>
-                <a:spcPct val="118000"/>
-              </a:lnSpc>
-              <a:buNone/>
-            </a:pPr>
-            <a:r>
-              <a:rPr lang="en-US" sz="1700" dirty="0">
-                <a:solidFill>
-                  <a:srgbClr val="18181B"/>
-                </a:solidFill>
-                <a:latin typeface="IBM Plex Mono" pitchFamily="34" charset="0"/>
-                <a:ea typeface="IBM Plex Mono" pitchFamily="34" charset="-122"/>
-                <a:cs typeface="IBM Plex Mono" pitchFamily="34" charset="-120"/>
-              </a:rPr>
-              <a:t>r</a:t>
-            </a:r>
-            <a:pPr indent="0" marL="0">
-              <a:lnSpc>
-                <a:spcPct val="118000"/>
-              </a:lnSpc>
-              <a:buNone/>
-            </a:pPr>
-            <a:r>
-              <a:rPr lang="en-US" sz="1700" dirty="0">
-                <a:solidFill>
-                  <a:srgbClr val="18181B"/>
-                </a:solidFill>
-                <a:latin typeface="IBM Plex Mono" pitchFamily="34" charset="0"/>
-                <a:ea typeface="IBM Plex Mono" pitchFamily="34" charset="-122"/>
-                <a:cs typeface="IBM Plex Mono" pitchFamily="34" charset="-120"/>
-              </a:rPr>
-              <a:t> </a:t>
-            </a:r>
-            <a:pPr indent="0" marL="0">
-              <a:lnSpc>
-                <a:spcPct val="118000"/>
-              </a:lnSpc>
-              <a:buNone/>
-            </a:pPr>
-            <a:r>
-              <a:rPr lang="en-US" sz="1700" dirty="0">
-                <a:solidFill>
-                  <a:srgbClr val="6B21A8"/>
-                </a:solidFill>
-                <a:latin typeface="IBM Plex Mono" pitchFamily="34" charset="0"/>
-                <a:ea typeface="IBM Plex Mono" pitchFamily="34" charset="-122"/>
-                <a:cs typeface="IBM Plex Mono" pitchFamily="34" charset="-120"/>
-              </a:rPr>
-              <a:t>in</a:t>
-            </a:r>
-            <a:pPr indent="0" marL="0">
-              <a:lnSpc>
-                <a:spcPct val="118000"/>
-              </a:lnSpc>
-              <a:buNone/>
-            </a:pPr>
-            <a:r>
-              <a:rPr lang="en-US" sz="1700" dirty="0">
-                <a:solidFill>
-                  <a:srgbClr val="18181B"/>
-                </a:solidFill>
-                <a:latin typeface="IBM Plex Mono" pitchFamily="34" charset="0"/>
-                <a:ea typeface="IBM Plex Mono" pitchFamily="34" charset="-122"/>
-                <a:cs typeface="IBM Plex Mono" pitchFamily="34" charset="-120"/>
-              </a:rPr>
-              <a:t> </a:t>
-            </a:r>
-            <a:pPr indent="0" marL="0">
-              <a:lnSpc>
-                <a:spcPct val="118000"/>
-              </a:lnSpc>
-              <a:buNone/>
-            </a:pPr>
-            <a:r>
-              <a:rPr lang="en-US" sz="1700" dirty="0">
-                <a:solidFill>
-                  <a:srgbClr val="1D4ED8"/>
-                </a:solidFill>
-                <a:latin typeface="IBM Plex Mono" pitchFamily="34" charset="0"/>
-                <a:ea typeface="IBM Plex Mono" pitchFamily="34" charset="-122"/>
-                <a:cs typeface="IBM Plex Mono" pitchFamily="34" charset="-120"/>
-              </a:rPr>
-              <a:t>range</a:t>
-            </a:r>
-            <a:pPr indent="0" marL="0">
-              <a:lnSpc>
-                <a:spcPct val="118000"/>
-              </a:lnSpc>
-              <a:buNone/>
-            </a:pPr>
-            <a:r>
-              <a:rPr lang="en-US" sz="1700" dirty="0">
-                <a:solidFill>
-                  <a:srgbClr val="3F3F46"/>
-                </a:solidFill>
-                <a:latin typeface="IBM Plex Mono" pitchFamily="34" charset="0"/>
-                <a:ea typeface="IBM Plex Mono" pitchFamily="34" charset="-122"/>
-                <a:cs typeface="IBM Plex Mono" pitchFamily="34" charset="-120"/>
-              </a:rPr>
-              <a:t>(</a:t>
-            </a:r>
-            <a:pPr indent="0" marL="0">
-              <a:lnSpc>
-                <a:spcPct val="118000"/>
-              </a:lnSpc>
-              <a:buNone/>
-            </a:pPr>
-            <a:r>
-              <a:rPr lang="en-US" sz="1700" dirty="0">
-                <a:solidFill>
-                  <a:srgbClr val="1D4ED8"/>
-                </a:solidFill>
-                <a:latin typeface="IBM Plex Mono" pitchFamily="34" charset="0"/>
-                <a:ea typeface="IBM Plex Mono" pitchFamily="34" charset="-122"/>
-                <a:cs typeface="IBM Plex Mono" pitchFamily="34" charset="-120"/>
-              </a:rPr>
-              <a:t>len</a:t>
-            </a:r>
-            <a:pPr indent="0" marL="0">
-              <a:lnSpc>
-                <a:spcPct val="118000"/>
-              </a:lnSpc>
-              <a:buNone/>
-            </a:pPr>
-            <a:r>
-              <a:rPr lang="en-US" sz="1700" dirty="0">
-                <a:solidFill>
-                  <a:srgbClr val="3F3F46"/>
-                </a:solidFill>
-                <a:latin typeface="IBM Plex Mono" pitchFamily="34" charset="0"/>
-                <a:ea typeface="IBM Plex Mono" pitchFamily="34" charset="-122"/>
-                <a:cs typeface="IBM Plex Mono" pitchFamily="34" charset="-120"/>
-              </a:rPr>
-              <a:t>(</a:t>
-            </a:r>
-            <a:pPr indent="0" marL="0">
-              <a:lnSpc>
-                <a:spcPct val="118000"/>
-              </a:lnSpc>
-              <a:buNone/>
-            </a:pPr>
-            <a:r>
-              <a:rPr lang="en-US" sz="1700" dirty="0">
-                <a:solidFill>
-                  <a:srgbClr val="18181B"/>
-                </a:solidFill>
-                <a:latin typeface="IBM Plex Mono" pitchFamily="34" charset="0"/>
-                <a:ea typeface="IBM Plex Mono" pitchFamily="34" charset="-122"/>
-                <a:cs typeface="IBM Plex Mono" pitchFamily="34" charset="-120"/>
-              </a:rPr>
-              <a:t>grid</a:t>
-            </a:r>
-            <a:pPr indent="0" marL="0">
-              <a:lnSpc>
-                <a:spcPct val="118000"/>
-              </a:lnSpc>
-              <a:buNone/>
-            </a:pPr>
-            <a:r>
-              <a:rPr lang="en-US" sz="1700" dirty="0">
-                <a:solidFill>
-                  <a:srgbClr val="3F3F46"/>
-                </a:solidFill>
-                <a:latin typeface="IBM Plex Mono" pitchFamily="34" charset="0"/>
-                <a:ea typeface="IBM Plex Mono" pitchFamily="34" charset="-122"/>
-                <a:cs typeface="IBM Plex Mono" pitchFamily="34" charset="-120"/>
-              </a:rPr>
-              <a:t>[</a:t>
-            </a:r>
-            <a:pPr indent="0" marL="0">
-              <a:lnSpc>
-                <a:spcPct val="118000"/>
-              </a:lnSpc>
-              <a:buNone/>
-            </a:pPr>
-            <a:r>
-              <a:rPr lang="en-US" sz="1700" dirty="0">
-                <a:solidFill>
-                  <a:srgbClr val="9A3412"/>
-                </a:solidFill>
-                <a:latin typeface="IBM Plex Mono" pitchFamily="34" charset="0"/>
-                <a:ea typeface="IBM Plex Mono" pitchFamily="34" charset="-122"/>
-                <a:cs typeface="IBM Plex Mono" pitchFamily="34" charset="-120"/>
-              </a:rPr>
-              <a:t>0</a:t>
-            </a:r>
-            <a:pPr indent="0" marL="0">
-              <a:lnSpc>
-                <a:spcPct val="118000"/>
-              </a:lnSpc>
-              <a:buNone/>
-            </a:pPr>
-            <a:r>
-              <a:rPr lang="en-US" sz="1700" dirty="0">
-                <a:solidFill>
-                  <a:srgbClr val="3F3F46"/>
-                </a:solidFill>
-                <a:latin typeface="IBM Plex Mono" pitchFamily="34" charset="0"/>
-                <a:ea typeface="IBM Plex Mono" pitchFamily="34" charset="-122"/>
-                <a:cs typeface="IBM Plex Mono" pitchFamily="34" charset="-120"/>
-              </a:rPr>
-              <a:t>]</a:t>
-            </a:r>
-            <a:pPr indent="0" marL="0">
-              <a:lnSpc>
-                <a:spcPct val="118000"/>
-              </a:lnSpc>
-              <a:buNone/>
-            </a:pPr>
-            <a:r>
-              <a:rPr lang="en-US" sz="1700" dirty="0">
-                <a:solidFill>
-                  <a:srgbClr val="3F3F46"/>
-                </a:solidFill>
-                <a:latin typeface="IBM Plex Mono" pitchFamily="34" charset="0"/>
-                <a:ea typeface="IBM Plex Mono" pitchFamily="34" charset="-122"/>
-                <a:cs typeface="IBM Plex Mono" pitchFamily="34" charset="-120"/>
-              </a:rPr>
-              <a:t>)</a:t>
-            </a:r>
-            <a:pPr indent="0" marL="0">
-              <a:lnSpc>
-                <a:spcPct val="118000"/>
-              </a:lnSpc>
-              <a:buNone/>
-            </a:pPr>
-            <a:r>
-              <a:rPr lang="en-US" sz="1700" dirty="0">
-                <a:solidFill>
-                  <a:srgbClr val="3F3F46"/>
-                </a:solidFill>
-                <a:latin typeface="IBM Plex Mono" pitchFamily="34" charset="0"/>
-                <a:ea typeface="IBM Plex Mono" pitchFamily="34" charset="-122"/>
-                <a:cs typeface="IBM Plex Mono" pitchFamily="34" charset="-120"/>
-              </a:rPr>
-              <a:t>)</a:t>
-            </a:r>
-            <a:pPr indent="0" marL="0">
-              <a:lnSpc>
-                <a:spcPct val="118000"/>
-              </a:lnSpc>
-              <a:buNone/>
-            </a:pPr>
-            <a:r>
-              <a:rPr lang="en-US" sz="1700" dirty="0">
-                <a:solidFill>
-                  <a:srgbClr val="101828"/>
+              <a:rPr lang="en-US" sz="1300" dirty="0">
+                <a:solidFill>
+                  <a:srgbClr val="667085"/>
                 </a:solidFill>
                 <a:latin typeface="IBM Plex Sans" pitchFamily="34" charset="0"/>
                 <a:ea typeface="IBM Plex Sans" pitchFamily="34" charset="-122"/>
                 <a:cs typeface="IBM Plex Sans" pitchFamily="34" charset="-120"/>
               </a:rPr>
-              <a:t>. Explain why this looks at the wrong number of cells, and write the line corrected.</a:t>
-            </a:r>
-            <a:endParaRPr lang="en-US" sz="1700" dirty="0"/>
-          </a:p>
-        </p:txBody>
-      </p:sp>
-      <p:sp>
-        <p:nvSpPr>
-          <p:cNvPr id="9" name="Shape 7"/>
+              <a:t>A grid is described as rows by columns, so a 3 by 4 grid has 3 rows of 4 items each.</a:t>
+            </a:r>
+            <a:endParaRPr lang="en-US" sz="1300" dirty="0"/>
+          </a:p>
+        </p:txBody>
+      </p:sp>
+      <p:sp>
+        <p:nvSpPr>
+          <p:cNvPr id="10" name="Shape 8"/>
           <p:cNvSpPr/>
           <p:nvPr/>
         </p:nvSpPr>
         <p:spPr>
           <a:xfrm>
-            <a:off x="10515600" y="2130552"/>
-            <a:ext cx="868680" cy="493776"/>
+            <a:off x="6217920" y="1828800"/>
+            <a:ext cx="5394960" cy="1737360"/>
           </a:xfrm>
           <a:prstGeom prst="roundRect">
             <a:avLst>
-              <a:gd name="adj" fmla="val 18519"/>
-            </a:avLst>
-          </a:prstGeom>
-          <a:solidFill>
-            <a:srgbClr val="EEF2FB"/>
-          </a:solidFill>
-          <a:ln/>
-        </p:spPr>
-      </p:sp>
-      <p:sp>
-        <p:nvSpPr>
-          <p:cNvPr id="10" name="Text 8"/>
-          <p:cNvSpPr txBox="1"/>
-          <p:nvPr/>
-        </p:nvSpPr>
-        <p:spPr>
-          <a:xfrm>
-            <a:off x="10515600" y="2130552"/>
-            <a:ext cx="868680" cy="493776"/>
-          </a:xfrm>
-          <a:prstGeom prst="rect">
-            <a:avLst/>
-          </a:prstGeom>
-          <a:noFill/>
-          <a:ln/>
-        </p:spPr>
-        <p:txBody>
-          <a:bodyPr wrap="square" lIns="0" tIns="0" rIns="0" bIns="0" rtlCol="0" anchor="ctr"/>
-          <a:lstStyle/>
-          <a:p>
-            <a:pPr algn="ctr" indent="0" marL="0">
-              <a:buNone/>
-            </a:pPr>
-            <a:r>
-              <a:rPr lang="en-US" sz="1500" b="1" dirty="0">
-                <a:solidFill>
-                  <a:srgbClr val="2D63FF"/>
-                </a:solidFill>
-                <a:latin typeface="IBM Plex Mono" pitchFamily="34" charset="0"/>
-                <a:ea typeface="IBM Plex Mono" pitchFamily="34" charset="-122"/>
-                <a:cs typeface="IBM Plex Mono" pitchFamily="34" charset="-120"/>
-              </a:rPr>
-              <a:t>[3]</a:t>
-            </a:r>
-            <a:endParaRPr lang="en-US" sz="1500" dirty="0"/>
-          </a:p>
-        </p:txBody>
-      </p:sp>
-      <p:sp>
-        <p:nvSpPr>
-          <p:cNvPr id="11" name="Shape 9"/>
-          <p:cNvSpPr/>
-          <p:nvPr/>
-        </p:nvSpPr>
-        <p:spPr>
-          <a:xfrm>
-            <a:off x="502920" y="3127248"/>
-            <a:ext cx="11155680" cy="1097280"/>
-          </a:xfrm>
-          <a:prstGeom prst="roundRect">
-            <a:avLst>
-              <a:gd name="adj" fmla="val 10000"/>
+              <a:gd name="adj" fmla="val 6316"/>
             </a:avLst>
           </a:prstGeom>
           <a:solidFill>
@@ -4437,7 +4493,7 @@
           </a:solidFill>
           <a:ln w="15875">
             <a:solidFill>
-              <a:srgbClr val="D9DEE7"/>
+              <a:srgbClr val="08A6A6"/>
             </a:solidFill>
             <a:prstDash val="solid"/>
           </a:ln>
@@ -4445,43 +4501,82 @@
       </p:sp>
       <p:sp>
         <p:nvSpPr>
-          <p:cNvPr id="12" name="Text 10"/>
-          <p:cNvSpPr txBox="1"/>
-          <p:nvPr/>
-        </p:nvSpPr>
-        <p:spPr>
-          <a:xfrm>
-            <a:off x="914400" y="3236976"/>
-            <a:ext cx="9418320" cy="877824"/>
-          </a:xfrm>
-          <a:prstGeom prst="rect">
-            <a:avLst/>
-          </a:prstGeom>
-          <a:noFill/>
-          <a:ln/>
-        </p:spPr>
-        <p:txBody>
-          <a:bodyPr wrap="square" lIns="0" tIns="0" rIns="0" bIns="0" rtlCol="0" anchor="ctr"/>
-          <a:lstStyle/>
-          <a:p>
-            <a:pPr indent="0" marL="0">
-              <a:lnSpc>
-                <a:spcPct val="118000"/>
-              </a:lnSpc>
-              <a:buNone/>
-            </a:pPr>
-            <a:r>
-              <a:rPr lang="en-US" sz="1700" dirty="0">
-                <a:solidFill>
-                  <a:srgbClr val="101828"/>
+          <p:cNvPr id="11" name="Text 9"/>
+          <p:cNvSpPr txBox="1"/>
+          <p:nvPr/>
+        </p:nvSpPr>
+        <p:spPr>
+          <a:xfrm>
+            <a:off x="6537960" y="2011680"/>
+            <a:ext cx="4754880" cy="365760"/>
+          </a:xfrm>
+          <a:prstGeom prst="rect">
+            <a:avLst/>
+          </a:prstGeom>
+          <a:noFill/>
+          <a:ln/>
+        </p:spPr>
+        <p:txBody>
+          <a:bodyPr wrap="square" lIns="0" tIns="0" rIns="0" bIns="0" rtlCol="0" anchor="ctr"/>
+          <a:lstStyle/>
+          <a:p>
+            <a:pPr indent="0" marL="0">
+              <a:buNone/>
+            </a:pPr>
+            <a:r>
+              <a:rPr lang="en-US" sz="1600" b="1" dirty="0">
+                <a:solidFill>
+                  <a:srgbClr val="08A6A6"/>
                 </a:solidFill>
                 <a:latin typeface="IBM Plex Sans" pitchFamily="34" charset="0"/>
                 <a:ea typeface="IBM Plex Sans" pitchFamily="34" charset="-122"/>
                 <a:cs typeface="IBM Plex Sans" pitchFamily="34" charset="-120"/>
               </a:rPr>
-              <a:t>Write a program that reads twelve whole numbers into a grid of three rows of four, then prints the total of each row on a line of its own.</a:t>
-            </a:r>
-            <a:endParaRPr lang="en-US" sz="1700" dirty="0"/>
+              <a:t>Two notations</a:t>
+            </a:r>
+            <a:endParaRPr lang="en-US" sz="1600" dirty="0"/>
+          </a:p>
+        </p:txBody>
+      </p:sp>
+      <p:sp>
+        <p:nvSpPr>
+          <p:cNvPr id="12" name="Text 10"/>
+          <p:cNvSpPr txBox="1"/>
+          <p:nvPr/>
+        </p:nvSpPr>
+        <p:spPr>
+          <a:xfrm>
+            <a:off x="6537960" y="2395728"/>
+            <a:ext cx="4754880" cy="1005840"/>
+          </a:xfrm>
+          <a:prstGeom prst="rect">
+            <a:avLst/>
+          </a:prstGeom>
+          <a:noFill/>
+          <a:ln/>
+        </p:spPr>
+        <p:txBody>
+          <a:bodyPr wrap="square" lIns="0" tIns="0" rIns="0" bIns="0" rtlCol="0" anchor="t"/>
+          <a:lstStyle/>
+          <a:p>
+            <a:pPr indent="0" marL="0">
+              <a:lnSpc>
+                <a:spcPct val="120000"/>
+              </a:lnSpc>
+              <a:buNone/>
+            </a:pPr>
+            <a:r>
+              <a:rPr lang="en-US" sz="1300" dirty="0">
+                <a:solidFill>
+                  <a:srgbClr val="667085"/>
+                </a:solidFill>
+                <a:latin typeface="IBM Plex Sans" pitchFamily="34" charset="0"/>
+                <a:ea typeface="IBM Plex Sans" pitchFamily="34" charset="-122"/>
+                <a:cs typeface="IBM Plex Sans" pitchFamily="34" charset="-120"/>
+              </a:rPr>
+              <a:t>Pseudocode in the exam writes a cell as array[1,2]. Python writes the same cell as grid[1][2].</a:t>
+            </a:r>
+            <a:endParaRPr lang="en-US" sz="1300" dirty="0"/>
           </a:p>
         </p:txBody>
       </p:sp>
@@ -4493,73 +4588,12 @@
         </p:nvSpPr>
         <p:spPr>
           <a:xfrm>
-            <a:off x="10515600" y="3429000"/>
-            <a:ext cx="868680" cy="493776"/>
+            <a:off x="502920" y="3794760"/>
+            <a:ext cx="5394960" cy="1737360"/>
           </a:xfrm>
           <a:prstGeom prst="roundRect">
             <a:avLst>
-              <a:gd name="adj" fmla="val 18519"/>
-            </a:avLst>
-          </a:prstGeom>
-          <a:solidFill>
-            <a:srgbClr val="EEF2FB"/>
-          </a:solidFill>
-          <a:ln/>
-        </p:spPr>
-      </p:sp>
-      <p:sp>
-        <p:nvSpPr>
-          <p:cNvPr id="14" name="Text 12"/>
-          <p:cNvSpPr txBox="1"/>
-          <p:nvPr/>
-        </p:nvSpPr>
-        <p:spPr>
-          <a:xfrm>
-            <a:off x="10515600" y="3429000"/>
-            <a:ext cx="868680" cy="493776"/>
-          </a:xfrm>
-          <a:prstGeom prst="rect">
-            <a:avLst/>
-          </a:prstGeom>
-          <a:noFill/>
-          <a:ln/>
-        </p:spPr>
-        <p:txBody>
-          <a:bodyPr wrap="square" lIns="0" tIns="0" rIns="0" bIns="0" rtlCol="0" anchor="ctr"/>
-          <a:lstStyle/>
-          <a:p>
-            <a:pPr algn="ctr" indent="0" marL="0">
-              <a:buNone/>
-            </a:pPr>
-            <a:r>
-              <a:rPr lang="en-US" sz="1500" b="1" dirty="0">
-                <a:solidFill>
-                  <a:srgbClr val="2D63FF"/>
-                </a:solidFill>
-                <a:latin typeface="IBM Plex Mono" pitchFamily="34" charset="0"/>
-                <a:ea typeface="IBM Plex Mono" pitchFamily="34" charset="-122"/>
-                <a:cs typeface="IBM Plex Mono" pitchFamily="34" charset="-120"/>
-              </a:rPr>
-              <a:t>[5]</a:t>
-            </a:r>
-            <a:endParaRPr lang="en-US" sz="1500" dirty="0"/>
-          </a:p>
-        </p:txBody>
-      </p:sp>
-      <p:sp>
-        <p:nvSpPr>
-          <p:cNvPr id="15" name="Shape 13"/>
-          <p:cNvSpPr/>
-          <p:nvPr/>
-        </p:nvSpPr>
-        <p:spPr>
-          <a:xfrm>
-            <a:off x="502920" y="4425696"/>
-            <a:ext cx="11155680" cy="1097280"/>
-          </a:xfrm>
-          <a:prstGeom prst="roundRect">
-            <a:avLst>
-              <a:gd name="adj" fmla="val 10000"/>
+              <a:gd name="adj" fmla="val 6316"/>
             </a:avLst>
           </a:prstGeom>
           <a:solidFill>
@@ -4567,7 +4601,7 @@
           </a:solidFill>
           <a:ln w="15875">
             <a:solidFill>
-              <a:srgbClr val="D9DEE7"/>
+              <a:srgbClr val="2D63FF"/>
             </a:solidFill>
             <a:prstDash val="solid"/>
           </a:ln>
@@ -4575,67 +4609,150 @@
       </p:sp>
       <p:sp>
         <p:nvSpPr>
-          <p:cNvPr id="16" name="Text 14"/>
-          <p:cNvSpPr txBox="1"/>
-          <p:nvPr/>
-        </p:nvSpPr>
-        <p:spPr>
-          <a:xfrm>
-            <a:off x="914400" y="4535424"/>
-            <a:ext cx="9418320" cy="877824"/>
-          </a:xfrm>
-          <a:prstGeom prst="rect">
-            <a:avLst/>
-          </a:prstGeom>
-          <a:noFill/>
-          <a:ln/>
-        </p:spPr>
-        <p:txBody>
-          <a:bodyPr wrap="square" lIns="0" tIns="0" rIns="0" bIns="0" rtlCol="0" anchor="ctr"/>
-          <a:lstStyle/>
-          <a:p>
-            <a:pPr indent="0" marL="0">
-              <a:lnSpc>
-                <a:spcPct val="118000"/>
-              </a:lnSpc>
-              <a:buNone/>
-            </a:pPr>
-            <a:r>
-              <a:rPr lang="en-US" sz="1700" dirty="0">
-                <a:solidFill>
-                  <a:srgbClr val="101828"/>
+          <p:cNvPr id="14" name="Text 12"/>
+          <p:cNvSpPr txBox="1"/>
+          <p:nvPr/>
+        </p:nvSpPr>
+        <p:spPr>
+          <a:xfrm>
+            <a:off x="822960" y="3977640"/>
+            <a:ext cx="4754880" cy="365760"/>
+          </a:xfrm>
+          <a:prstGeom prst="rect">
+            <a:avLst/>
+          </a:prstGeom>
+          <a:noFill/>
+          <a:ln/>
+        </p:spPr>
+        <p:txBody>
+          <a:bodyPr wrap="square" lIns="0" tIns="0" rIns="0" bIns="0" rtlCol="0" anchor="ctr"/>
+          <a:lstStyle/>
+          <a:p>
+            <a:pPr indent="0" marL="0">
+              <a:buNone/>
+            </a:pPr>
+            <a:r>
+              <a:rPr lang="en-US" sz="1600" b="1" dirty="0">
+                <a:solidFill>
+                  <a:srgbClr val="2D63FF"/>
                 </a:solidFill>
                 <a:latin typeface="IBM Plex Sans" pitchFamily="34" charset="0"/>
                 <a:ea typeface="IBM Plex Sans" pitchFamily="34" charset="-122"/>
                 <a:cs typeface="IBM Plex Sans" pitchFamily="34" charset="-120"/>
               </a:rPr>
-              <a:t>A grid of 2 rows by 3 columns is already stored in a program. Write the code that prints it one row to a line, with single spaces between the values and no brackets.</a:t>
-            </a:r>
-            <a:endParaRPr lang="en-US" sz="1700" dirty="0"/>
-          </a:p>
-        </p:txBody>
-      </p:sp>
-      <p:sp>
-        <p:nvSpPr>
-          <p:cNvPr id="17" name="Shape 15"/>
+              <a:t>One long line</a:t>
+            </a:r>
+            <a:endParaRPr lang="en-US" sz="1600" dirty="0"/>
+          </a:p>
+        </p:txBody>
+      </p:sp>
+      <p:sp>
+        <p:nvSpPr>
+          <p:cNvPr id="15" name="Text 13"/>
+          <p:cNvSpPr txBox="1"/>
+          <p:nvPr/>
+        </p:nvSpPr>
+        <p:spPr>
+          <a:xfrm>
+            <a:off x="822960" y="4361688"/>
+            <a:ext cx="4754880" cy="1005840"/>
+          </a:xfrm>
+          <a:prstGeom prst="rect">
+            <a:avLst/>
+          </a:prstGeom>
+          <a:noFill/>
+          <a:ln/>
+        </p:spPr>
+        <p:txBody>
+          <a:bodyPr wrap="square" lIns="0" tIns="0" rIns="0" bIns="0" rtlCol="0" anchor="t"/>
+          <a:lstStyle/>
+          <a:p>
+            <a:pPr indent="0" marL="0">
+              <a:lnSpc>
+                <a:spcPct val="120000"/>
+              </a:lnSpc>
+              <a:buNone/>
+            </a:pPr>
+            <a:r>
+              <a:rPr lang="en-US" sz="1300" dirty="0">
+                <a:solidFill>
+                  <a:srgbClr val="667085"/>
+                </a:solidFill>
+                <a:latin typeface="IBM Plex Sans" pitchFamily="34" charset="0"/>
+                <a:ea typeface="IBM Plex Sans" pitchFamily="34" charset="-122"/>
+                <a:cs typeface="IBM Plex Sans" pitchFamily="34" charset="-120"/>
+              </a:rPr>
+              <a:t>Memory is one long line of addresses, so a grid is stored row after row. Reading along a row is the natural direction.</a:t>
+            </a:r>
+            <a:endParaRPr lang="en-US" sz="1300" dirty="0"/>
+          </a:p>
+        </p:txBody>
+      </p:sp>
+      <p:sp>
+        <p:nvSpPr>
+          <p:cNvPr id="16" name="Shape 14"/>
           <p:cNvSpPr/>
           <p:nvPr/>
         </p:nvSpPr>
         <p:spPr>
           <a:xfrm>
-            <a:off x="10515600" y="4727448"/>
-            <a:ext cx="868680" cy="493776"/>
+            <a:off x="6217920" y="3794760"/>
+            <a:ext cx="5394960" cy="1737360"/>
           </a:xfrm>
           <a:prstGeom prst="roundRect">
             <a:avLst>
-              <a:gd name="adj" fmla="val 18519"/>
+              <a:gd name="adj" fmla="val 6316"/>
             </a:avLst>
           </a:prstGeom>
           <a:solidFill>
-            <a:srgbClr val="EEF2FB"/>
+            <a:srgbClr val="FFFFFF"/>
           </a:solidFill>
-          <a:ln/>
-        </p:spPr>
+          <a:ln w="15875">
+            <a:solidFill>
+              <a:srgbClr val="08A6A6"/>
+            </a:solidFill>
+            <a:prstDash val="solid"/>
+          </a:ln>
+        </p:spPr>
+      </p:sp>
+      <p:sp>
+        <p:nvSpPr>
+          <p:cNvPr id="17" name="Text 15"/>
+          <p:cNvSpPr txBox="1"/>
+          <p:nvPr/>
+        </p:nvSpPr>
+        <p:spPr>
+          <a:xfrm>
+            <a:off x="6537960" y="3977640"/>
+            <a:ext cx="4754880" cy="365760"/>
+          </a:xfrm>
+          <a:prstGeom prst="rect">
+            <a:avLst/>
+          </a:prstGeom>
+          <a:noFill/>
+          <a:ln/>
+        </p:spPr>
+        <p:txBody>
+          <a:bodyPr wrap="square" lIns="0" tIns="0" rIns="0" bIns="0" rtlCol="0" anchor="ctr"/>
+          <a:lstStyle/>
+          <a:p>
+            <a:pPr indent="0" marL="0">
+              <a:buNone/>
+            </a:pPr>
+            <a:r>
+              <a:rPr lang="en-US" sz="1600" b="1" dirty="0">
+                <a:solidFill>
+                  <a:srgbClr val="08A6A6"/>
+                </a:solidFill>
+                <a:latin typeface="IBM Plex Sans" pitchFamily="34" charset="0"/>
+                <a:ea typeface="IBM Plex Sans" pitchFamily="34" charset="-122"/>
+                <a:cs typeface="IBM Plex Sans" pitchFamily="34" charset="-120"/>
+              </a:rPr>
+              <a:t>sum() a row</a:t>
+            </a:r>
+            <a:endParaRPr lang="en-US" sz="1600" dirty="0"/>
+          </a:p>
+        </p:txBody>
       </p:sp>
       <p:sp>
         <p:nvSpPr>
@@ -4645,34 +4762,37 @@
         </p:nvSpPr>
         <p:spPr>
           <a:xfrm>
-            <a:off x="10515600" y="4727448"/>
-            <a:ext cx="868680" cy="493776"/>
-          </a:xfrm>
-          <a:prstGeom prst="rect">
-            <a:avLst/>
-          </a:prstGeom>
-          <a:noFill/>
-          <a:ln/>
-        </p:spPr>
-        <p:txBody>
-          <a:bodyPr wrap="square" lIns="0" tIns="0" rIns="0" bIns="0" rtlCol="0" anchor="ctr"/>
-          <a:lstStyle/>
-          <a:p>
-            <a:pPr algn="ctr" indent="0" marL="0">
-              <a:buNone/>
-            </a:pPr>
-            <a:r>
-              <a:rPr lang="en-US" sz="1500" b="1" dirty="0">
-                <a:solidFill>
-                  <a:srgbClr val="2D63FF"/>
-                </a:solidFill>
-                <a:latin typeface="IBM Plex Mono" pitchFamily="34" charset="0"/>
-                <a:ea typeface="IBM Plex Mono" pitchFamily="34" charset="-122"/>
-                <a:cs typeface="IBM Plex Mono" pitchFamily="34" charset="-120"/>
-              </a:rPr>
-              <a:t>[4]</a:t>
-            </a:r>
-            <a:endParaRPr lang="en-US" sz="1500" dirty="0"/>
+            <a:off x="6537960" y="4361688"/>
+            <a:ext cx="4754880" cy="1005840"/>
+          </a:xfrm>
+          <a:prstGeom prst="rect">
+            <a:avLst/>
+          </a:prstGeom>
+          <a:noFill/>
+          <a:ln/>
+        </p:spPr>
+        <p:txBody>
+          <a:bodyPr wrap="square" lIns="0" tIns="0" rIns="0" bIns="0" rtlCol="0" anchor="t"/>
+          <a:lstStyle/>
+          <a:p>
+            <a:pPr indent="0" marL="0">
+              <a:lnSpc>
+                <a:spcPct val="120000"/>
+              </a:lnSpc>
+              <a:buNone/>
+            </a:pPr>
+            <a:r>
+              <a:rPr lang="en-US" sz="1300" dirty="0">
+                <a:solidFill>
+                  <a:srgbClr val="667085"/>
+                </a:solidFill>
+                <a:latin typeface="IBM Plex Sans" pitchFamily="34" charset="0"/>
+                <a:ea typeface="IBM Plex Sans" pitchFamily="34" charset="-122"/>
+                <a:cs typeface="IBM Plex Sans" pitchFamily="34" charset="-120"/>
+              </a:rPr>
+              <a:t>sum() totals a list, so sum(grid[0]) totals a whole row in one step - but a column still needs a loop.</a:t>
+            </a:r>
+            <a:endParaRPr lang="en-US" sz="1300" dirty="0"/>
           </a:p>
         </p:txBody>
       </p:sp>
@@ -4687,6 +4807,893 @@
 <file path=ppt/slides/slide14.xml><?xml version="1.0" encoding="utf-8"?>
 <p:sld xmlns:a="http://schemas.openxmlformats.org/drawingml/2006/main" xmlns:r="http://schemas.openxmlformats.org/officeDocument/2006/relationships" xmlns:p="http://schemas.openxmlformats.org/presentationml/2006/main">
   <p:cSld name="Slide 14">
+    <p:bg>
+      <p:bgPr>
+        <a:solidFill>
+          <a:srgbClr val="F7F7F4"/>
+        </a:solidFill>
+      </p:bgPr>
+    </p:bg>
+    <p:spTree>
+      <p:nvGrpSpPr>
+        <p:cNvPr id="1" name=""/>
+        <p:cNvGrpSpPr/>
+        <p:nvPr/>
+      </p:nvGrpSpPr>
+      <p:grpSpPr>
+        <a:xfrm>
+          <a:off x="0" y="0"/>
+          <a:ext cx="0" cy="0"/>
+          <a:chOff x="0" y="0"/>
+          <a:chExt cx="0" cy="0"/>
+        </a:xfrm>
+      </p:grpSpPr>
+      <p:sp>
+        <p:nvSpPr>
+          <p:cNvPr id="2" name="Shape 0"/>
+          <p:cNvSpPr/>
+          <p:nvPr/>
+        </p:nvSpPr>
+        <p:spPr>
+          <a:xfrm>
+            <a:off x="0" y="0"/>
+            <a:ext cx="12188952" cy="82296"/>
+          </a:xfrm>
+          <a:prstGeom prst="rect">
+            <a:avLst/>
+          </a:prstGeom>
+          <a:solidFill>
+            <a:srgbClr val="2D63FF"/>
+          </a:solidFill>
+          <a:ln/>
+        </p:spPr>
+      </p:sp>
+      <p:sp>
+        <p:nvSpPr>
+          <p:cNvPr id="3" name="Text 1"/>
+          <p:cNvSpPr txBox="1"/>
+          <p:nvPr/>
+        </p:nvSpPr>
+        <p:spPr>
+          <a:xfrm>
+            <a:off x="502920" y="6236208"/>
+            <a:ext cx="7772400" cy="365760"/>
+          </a:xfrm>
+          <a:prstGeom prst="rect">
+            <a:avLst/>
+          </a:prstGeom>
+          <a:noFill/>
+          <a:ln/>
+        </p:spPr>
+        <p:txBody>
+          <a:bodyPr wrap="square" lIns="0" tIns="0" rIns="0" bIns="0" rtlCol="0" anchor="ctr"/>
+          <a:lstStyle/>
+          <a:p>
+            <a:pPr indent="0" marL="0">
+              <a:buNone/>
+            </a:pPr>
+            <a:r>
+              <a:rPr lang="en-US" sz="1100" dirty="0">
+                <a:solidFill>
+                  <a:srgbClr val="667085"/>
+                </a:solidFill>
+                <a:latin typeface="IBM Plex Mono" pitchFamily="34" charset="0"/>
+                <a:ea typeface="IBM Plex Mono" pitchFamily="34" charset="-122"/>
+                <a:cs typeface="IBM Plex Mono" pitchFamily="34" charset="-120"/>
+              </a:rPr>
+              <a:t>Python programming  |  Lesson 8</a:t>
+            </a:r>
+            <a:endParaRPr lang="en-US" sz="1100" dirty="0"/>
+          </a:p>
+        </p:txBody>
+      </p:sp>
+      <p:sp>
+        <p:nvSpPr>
+          <p:cNvPr id="4" name="Text 2"/>
+          <p:cNvSpPr txBox="1"/>
+          <p:nvPr/>
+        </p:nvSpPr>
+        <p:spPr>
+          <a:xfrm>
+            <a:off x="9326880" y="6236208"/>
+            <a:ext cx="2377440" cy="365760"/>
+          </a:xfrm>
+          <a:prstGeom prst="rect">
+            <a:avLst/>
+          </a:prstGeom>
+          <a:noFill/>
+          <a:ln/>
+        </p:spPr>
+        <p:txBody>
+          <a:bodyPr wrap="square" lIns="0" tIns="0" rIns="0" bIns="0" rtlCol="0" anchor="ctr"/>
+          <a:lstStyle/>
+          <a:p>
+            <a:pPr algn="r" indent="0" marL="0">
+              <a:buNone/>
+            </a:pPr>
+            <a:r>
+              <a:rPr lang="en-US" sz="1100" dirty="0">
+                <a:solidFill>
+                  <a:srgbClr val="667085"/>
+                </a:solidFill>
+                <a:latin typeface="IBM Plex Mono" pitchFamily="34" charset="0"/>
+                <a:ea typeface="IBM Plex Mono" pitchFamily="34" charset="-122"/>
+                <a:cs typeface="IBM Plex Mono" pitchFamily="34" charset="-120"/>
+              </a:rPr>
+              <a:t>Revise 360</a:t>
+            </a:r>
+            <a:endParaRPr lang="en-US" sz="1100" dirty="0"/>
+          </a:p>
+        </p:txBody>
+      </p:sp>
+      <p:sp>
+        <p:nvSpPr>
+          <p:cNvPr id="5" name="Text 3"/>
+          <p:cNvSpPr txBox="1"/>
+          <p:nvPr/>
+        </p:nvSpPr>
+        <p:spPr>
+          <a:xfrm>
+            <a:off x="502920" y="411480"/>
+            <a:ext cx="11155680" cy="777240"/>
+          </a:xfrm>
+          <a:prstGeom prst="rect">
+            <a:avLst/>
+          </a:prstGeom>
+          <a:noFill/>
+          <a:ln/>
+        </p:spPr>
+        <p:txBody>
+          <a:bodyPr wrap="square" lIns="0" tIns="0" rIns="0" bIns="0" rtlCol="0" anchor="ctr"/>
+          <a:lstStyle/>
+          <a:p>
+            <a:pPr indent="0" marL="0">
+              <a:buNone/>
+            </a:pPr>
+            <a:r>
+              <a:rPr lang="en-US" sz="3200" b="1" dirty="0">
+                <a:solidFill>
+                  <a:srgbClr val="101828"/>
+                </a:solidFill>
+                <a:latin typeface="IBM Plex Sans" pitchFamily="34" charset="0"/>
+                <a:ea typeface="IBM Plex Sans" pitchFamily="34" charset="-122"/>
+                <a:cs typeface="IBM Plex Sans" pitchFamily="34" charset="-120"/>
+              </a:rPr>
+              <a:t>Exam practice</a:t>
+            </a:r>
+            <a:endParaRPr lang="en-US" sz="3200" dirty="0"/>
+          </a:p>
+        </p:txBody>
+      </p:sp>
+      <p:sp>
+        <p:nvSpPr>
+          <p:cNvPr id="6" name="Text 4"/>
+          <p:cNvSpPr txBox="1"/>
+          <p:nvPr/>
+        </p:nvSpPr>
+        <p:spPr>
+          <a:xfrm>
+            <a:off x="502920" y="1170432"/>
+            <a:ext cx="11155680" cy="411480"/>
+          </a:xfrm>
+          <a:prstGeom prst="rect">
+            <a:avLst/>
+          </a:prstGeom>
+          <a:noFill/>
+          <a:ln/>
+        </p:spPr>
+        <p:txBody>
+          <a:bodyPr wrap="square" lIns="0" tIns="0" rIns="0" bIns="0" rtlCol="0" anchor="ctr"/>
+          <a:lstStyle/>
+          <a:p>
+            <a:pPr indent="0" marL="0">
+              <a:buNone/>
+            </a:pPr>
+            <a:r>
+              <a:rPr lang="en-US" sz="1500" dirty="0">
+                <a:solidFill>
+                  <a:srgbClr val="667085"/>
+                </a:solidFill>
+                <a:latin typeface="IBM Plex Sans" pitchFamily="34" charset="0"/>
+                <a:ea typeface="IBM Plex Sans" pitchFamily="34" charset="-122"/>
+                <a:cs typeface="IBM Plex Sans" pitchFamily="34" charset="-120"/>
+              </a:rPr>
+              <a:t>Devices away. Answer from memory on the worksheet.</a:t>
+            </a:r>
+            <a:endParaRPr lang="en-US" sz="1500" dirty="0"/>
+          </a:p>
+        </p:txBody>
+      </p:sp>
+      <p:sp>
+        <p:nvSpPr>
+          <p:cNvPr id="7" name="Shape 5"/>
+          <p:cNvSpPr/>
+          <p:nvPr/>
+        </p:nvSpPr>
+        <p:spPr>
+          <a:xfrm>
+            <a:off x="502920" y="1828800"/>
+            <a:ext cx="11155680" cy="1097280"/>
+          </a:xfrm>
+          <a:prstGeom prst="roundRect">
+            <a:avLst>
+              <a:gd name="adj" fmla="val 10000"/>
+            </a:avLst>
+          </a:prstGeom>
+          <a:solidFill>
+            <a:srgbClr val="FFFFFF"/>
+          </a:solidFill>
+          <a:ln w="15875">
+            <a:solidFill>
+              <a:srgbClr val="D9DEE7"/>
+            </a:solidFill>
+            <a:prstDash val="solid"/>
+          </a:ln>
+        </p:spPr>
+      </p:sp>
+      <p:sp>
+        <p:nvSpPr>
+          <p:cNvPr id="8" name="Text 6"/>
+          <p:cNvSpPr txBox="1"/>
+          <p:nvPr/>
+        </p:nvSpPr>
+        <p:spPr>
+          <a:xfrm>
+            <a:off x="914400" y="1938528"/>
+            <a:ext cx="9418320" cy="877824"/>
+          </a:xfrm>
+          <a:prstGeom prst="rect">
+            <a:avLst/>
+          </a:prstGeom>
+          <a:noFill/>
+          <a:ln/>
+        </p:spPr>
+        <p:txBody>
+          <a:bodyPr wrap="square" lIns="0" tIns="0" rIns="0" bIns="0" rtlCol="0" anchor="ctr"/>
+          <a:lstStyle/>
+          <a:p>
+            <a:pPr indent="0" marL="0">
+              <a:lnSpc>
+                <a:spcPct val="118000"/>
+              </a:lnSpc>
+              <a:buNone/>
+            </a:pPr>
+            <a:r>
+              <a:rPr lang="en-US" sz="1700" dirty="0">
+                <a:solidFill>
+                  <a:srgbClr val="101828"/>
+                </a:solidFill>
+                <a:latin typeface="IBM Plex Sans" pitchFamily="34" charset="0"/>
+                <a:ea typeface="IBM Plex Sans" pitchFamily="34" charset="-122"/>
+                <a:cs typeface="IBM Plex Sans" pitchFamily="34" charset="-120"/>
+              </a:rPr>
+              <a:t>A program that should total column 2 of a grid of 4 rows by 3 columns begins its loop with </a:t>
+            </a:r>
+            <a:pPr indent="0" marL="0">
+              <a:lnSpc>
+                <a:spcPct val="118000"/>
+              </a:lnSpc>
+              <a:buNone/>
+            </a:pPr>
+            <a:r>
+              <a:rPr lang="en-US" sz="1700" dirty="0">
+                <a:solidFill>
+                  <a:srgbClr val="6B21A8"/>
+                </a:solidFill>
+                <a:latin typeface="IBM Plex Mono" pitchFamily="34" charset="0"/>
+                <a:ea typeface="IBM Plex Mono" pitchFamily="34" charset="-122"/>
+                <a:cs typeface="IBM Plex Mono" pitchFamily="34" charset="-120"/>
+              </a:rPr>
+              <a:t>for</a:t>
+            </a:r>
+            <a:pPr indent="0" marL="0">
+              <a:lnSpc>
+                <a:spcPct val="118000"/>
+              </a:lnSpc>
+              <a:buNone/>
+            </a:pPr>
+            <a:r>
+              <a:rPr lang="en-US" sz="1700" dirty="0">
+                <a:solidFill>
+                  <a:srgbClr val="18181B"/>
+                </a:solidFill>
+                <a:latin typeface="IBM Plex Mono" pitchFamily="34" charset="0"/>
+                <a:ea typeface="IBM Plex Mono" pitchFamily="34" charset="-122"/>
+                <a:cs typeface="IBM Plex Mono" pitchFamily="34" charset="-120"/>
+              </a:rPr>
+              <a:t> </a:t>
+            </a:r>
+            <a:pPr indent="0" marL="0">
+              <a:lnSpc>
+                <a:spcPct val="118000"/>
+              </a:lnSpc>
+              <a:buNone/>
+            </a:pPr>
+            <a:r>
+              <a:rPr lang="en-US" sz="1700" dirty="0">
+                <a:solidFill>
+                  <a:srgbClr val="18181B"/>
+                </a:solidFill>
+                <a:latin typeface="IBM Plex Mono" pitchFamily="34" charset="0"/>
+                <a:ea typeface="IBM Plex Mono" pitchFamily="34" charset="-122"/>
+                <a:cs typeface="IBM Plex Mono" pitchFamily="34" charset="-120"/>
+              </a:rPr>
+              <a:t>r</a:t>
+            </a:r>
+            <a:pPr indent="0" marL="0">
+              <a:lnSpc>
+                <a:spcPct val="118000"/>
+              </a:lnSpc>
+              <a:buNone/>
+            </a:pPr>
+            <a:r>
+              <a:rPr lang="en-US" sz="1700" dirty="0">
+                <a:solidFill>
+                  <a:srgbClr val="18181B"/>
+                </a:solidFill>
+                <a:latin typeface="IBM Plex Mono" pitchFamily="34" charset="0"/>
+                <a:ea typeface="IBM Plex Mono" pitchFamily="34" charset="-122"/>
+                <a:cs typeface="IBM Plex Mono" pitchFamily="34" charset="-120"/>
+              </a:rPr>
+              <a:t> </a:t>
+            </a:r>
+            <a:pPr indent="0" marL="0">
+              <a:lnSpc>
+                <a:spcPct val="118000"/>
+              </a:lnSpc>
+              <a:buNone/>
+            </a:pPr>
+            <a:r>
+              <a:rPr lang="en-US" sz="1700" dirty="0">
+                <a:solidFill>
+                  <a:srgbClr val="6B21A8"/>
+                </a:solidFill>
+                <a:latin typeface="IBM Plex Mono" pitchFamily="34" charset="0"/>
+                <a:ea typeface="IBM Plex Mono" pitchFamily="34" charset="-122"/>
+                <a:cs typeface="IBM Plex Mono" pitchFamily="34" charset="-120"/>
+              </a:rPr>
+              <a:t>in</a:t>
+            </a:r>
+            <a:pPr indent="0" marL="0">
+              <a:lnSpc>
+                <a:spcPct val="118000"/>
+              </a:lnSpc>
+              <a:buNone/>
+            </a:pPr>
+            <a:r>
+              <a:rPr lang="en-US" sz="1700" dirty="0">
+                <a:solidFill>
+                  <a:srgbClr val="18181B"/>
+                </a:solidFill>
+                <a:latin typeface="IBM Plex Mono" pitchFamily="34" charset="0"/>
+                <a:ea typeface="IBM Plex Mono" pitchFamily="34" charset="-122"/>
+                <a:cs typeface="IBM Plex Mono" pitchFamily="34" charset="-120"/>
+              </a:rPr>
+              <a:t> </a:t>
+            </a:r>
+            <a:pPr indent="0" marL="0">
+              <a:lnSpc>
+                <a:spcPct val="118000"/>
+              </a:lnSpc>
+              <a:buNone/>
+            </a:pPr>
+            <a:r>
+              <a:rPr lang="en-US" sz="1700" dirty="0">
+                <a:solidFill>
+                  <a:srgbClr val="1D4ED8"/>
+                </a:solidFill>
+                <a:latin typeface="IBM Plex Mono" pitchFamily="34" charset="0"/>
+                <a:ea typeface="IBM Plex Mono" pitchFamily="34" charset="-122"/>
+                <a:cs typeface="IBM Plex Mono" pitchFamily="34" charset="-120"/>
+              </a:rPr>
+              <a:t>range</a:t>
+            </a:r>
+            <a:pPr indent="0" marL="0">
+              <a:lnSpc>
+                <a:spcPct val="118000"/>
+              </a:lnSpc>
+              <a:buNone/>
+            </a:pPr>
+            <a:r>
+              <a:rPr lang="en-US" sz="1700" dirty="0">
+                <a:solidFill>
+                  <a:srgbClr val="3F3F46"/>
+                </a:solidFill>
+                <a:latin typeface="IBM Plex Mono" pitchFamily="34" charset="0"/>
+                <a:ea typeface="IBM Plex Mono" pitchFamily="34" charset="-122"/>
+                <a:cs typeface="IBM Plex Mono" pitchFamily="34" charset="-120"/>
+              </a:rPr>
+              <a:t>(</a:t>
+            </a:r>
+            <a:pPr indent="0" marL="0">
+              <a:lnSpc>
+                <a:spcPct val="118000"/>
+              </a:lnSpc>
+              <a:buNone/>
+            </a:pPr>
+            <a:r>
+              <a:rPr lang="en-US" sz="1700" dirty="0">
+                <a:solidFill>
+                  <a:srgbClr val="1D4ED8"/>
+                </a:solidFill>
+                <a:latin typeface="IBM Plex Mono" pitchFamily="34" charset="0"/>
+                <a:ea typeface="IBM Plex Mono" pitchFamily="34" charset="-122"/>
+                <a:cs typeface="IBM Plex Mono" pitchFamily="34" charset="-120"/>
+              </a:rPr>
+              <a:t>len</a:t>
+            </a:r>
+            <a:pPr indent="0" marL="0">
+              <a:lnSpc>
+                <a:spcPct val="118000"/>
+              </a:lnSpc>
+              <a:buNone/>
+            </a:pPr>
+            <a:r>
+              <a:rPr lang="en-US" sz="1700" dirty="0">
+                <a:solidFill>
+                  <a:srgbClr val="3F3F46"/>
+                </a:solidFill>
+                <a:latin typeface="IBM Plex Mono" pitchFamily="34" charset="0"/>
+                <a:ea typeface="IBM Plex Mono" pitchFamily="34" charset="-122"/>
+                <a:cs typeface="IBM Plex Mono" pitchFamily="34" charset="-120"/>
+              </a:rPr>
+              <a:t>(</a:t>
+            </a:r>
+            <a:pPr indent="0" marL="0">
+              <a:lnSpc>
+                <a:spcPct val="118000"/>
+              </a:lnSpc>
+              <a:buNone/>
+            </a:pPr>
+            <a:r>
+              <a:rPr lang="en-US" sz="1700" dirty="0">
+                <a:solidFill>
+                  <a:srgbClr val="18181B"/>
+                </a:solidFill>
+                <a:latin typeface="IBM Plex Mono" pitchFamily="34" charset="0"/>
+                <a:ea typeface="IBM Plex Mono" pitchFamily="34" charset="-122"/>
+                <a:cs typeface="IBM Plex Mono" pitchFamily="34" charset="-120"/>
+              </a:rPr>
+              <a:t>grid</a:t>
+            </a:r>
+            <a:pPr indent="0" marL="0">
+              <a:lnSpc>
+                <a:spcPct val="118000"/>
+              </a:lnSpc>
+              <a:buNone/>
+            </a:pPr>
+            <a:r>
+              <a:rPr lang="en-US" sz="1700" dirty="0">
+                <a:solidFill>
+                  <a:srgbClr val="3F3F46"/>
+                </a:solidFill>
+                <a:latin typeface="IBM Plex Mono" pitchFamily="34" charset="0"/>
+                <a:ea typeface="IBM Plex Mono" pitchFamily="34" charset="-122"/>
+                <a:cs typeface="IBM Plex Mono" pitchFamily="34" charset="-120"/>
+              </a:rPr>
+              <a:t>[</a:t>
+            </a:r>
+            <a:pPr indent="0" marL="0">
+              <a:lnSpc>
+                <a:spcPct val="118000"/>
+              </a:lnSpc>
+              <a:buNone/>
+            </a:pPr>
+            <a:r>
+              <a:rPr lang="en-US" sz="1700" dirty="0">
+                <a:solidFill>
+                  <a:srgbClr val="9A3412"/>
+                </a:solidFill>
+                <a:latin typeface="IBM Plex Mono" pitchFamily="34" charset="0"/>
+                <a:ea typeface="IBM Plex Mono" pitchFamily="34" charset="-122"/>
+                <a:cs typeface="IBM Plex Mono" pitchFamily="34" charset="-120"/>
+              </a:rPr>
+              <a:t>0</a:t>
+            </a:r>
+            <a:pPr indent="0" marL="0">
+              <a:lnSpc>
+                <a:spcPct val="118000"/>
+              </a:lnSpc>
+              <a:buNone/>
+            </a:pPr>
+            <a:r>
+              <a:rPr lang="en-US" sz="1700" dirty="0">
+                <a:solidFill>
+                  <a:srgbClr val="3F3F46"/>
+                </a:solidFill>
+                <a:latin typeface="IBM Plex Mono" pitchFamily="34" charset="0"/>
+                <a:ea typeface="IBM Plex Mono" pitchFamily="34" charset="-122"/>
+                <a:cs typeface="IBM Plex Mono" pitchFamily="34" charset="-120"/>
+              </a:rPr>
+              <a:t>]</a:t>
+            </a:r>
+            <a:pPr indent="0" marL="0">
+              <a:lnSpc>
+                <a:spcPct val="118000"/>
+              </a:lnSpc>
+              <a:buNone/>
+            </a:pPr>
+            <a:r>
+              <a:rPr lang="en-US" sz="1700" dirty="0">
+                <a:solidFill>
+                  <a:srgbClr val="3F3F46"/>
+                </a:solidFill>
+                <a:latin typeface="IBM Plex Mono" pitchFamily="34" charset="0"/>
+                <a:ea typeface="IBM Plex Mono" pitchFamily="34" charset="-122"/>
+                <a:cs typeface="IBM Plex Mono" pitchFamily="34" charset="-120"/>
+              </a:rPr>
+              <a:t>)</a:t>
+            </a:r>
+            <a:pPr indent="0" marL="0">
+              <a:lnSpc>
+                <a:spcPct val="118000"/>
+              </a:lnSpc>
+              <a:buNone/>
+            </a:pPr>
+            <a:r>
+              <a:rPr lang="en-US" sz="1700" dirty="0">
+                <a:solidFill>
+                  <a:srgbClr val="3F3F46"/>
+                </a:solidFill>
+                <a:latin typeface="IBM Plex Mono" pitchFamily="34" charset="0"/>
+                <a:ea typeface="IBM Plex Mono" pitchFamily="34" charset="-122"/>
+                <a:cs typeface="IBM Plex Mono" pitchFamily="34" charset="-120"/>
+              </a:rPr>
+              <a:t>)</a:t>
+            </a:r>
+            <a:pPr indent="0" marL="0">
+              <a:lnSpc>
+                <a:spcPct val="118000"/>
+              </a:lnSpc>
+              <a:buNone/>
+            </a:pPr>
+            <a:r>
+              <a:rPr lang="en-US" sz="1700" dirty="0">
+                <a:solidFill>
+                  <a:srgbClr val="101828"/>
+                </a:solidFill>
+                <a:latin typeface="IBM Plex Sans" pitchFamily="34" charset="0"/>
+                <a:ea typeface="IBM Plex Sans" pitchFamily="34" charset="-122"/>
+                <a:cs typeface="IBM Plex Sans" pitchFamily="34" charset="-120"/>
+              </a:rPr>
+              <a:t>. Explain why this looks at the wrong number of cells, and write the line corrected.</a:t>
+            </a:r>
+            <a:endParaRPr lang="en-US" sz="1700" dirty="0"/>
+          </a:p>
+        </p:txBody>
+      </p:sp>
+      <p:sp>
+        <p:nvSpPr>
+          <p:cNvPr id="9" name="Shape 7"/>
+          <p:cNvSpPr/>
+          <p:nvPr/>
+        </p:nvSpPr>
+        <p:spPr>
+          <a:xfrm>
+            <a:off x="10515600" y="2130552"/>
+            <a:ext cx="868680" cy="493776"/>
+          </a:xfrm>
+          <a:prstGeom prst="roundRect">
+            <a:avLst>
+              <a:gd name="adj" fmla="val 18519"/>
+            </a:avLst>
+          </a:prstGeom>
+          <a:solidFill>
+            <a:srgbClr val="EEF2FB"/>
+          </a:solidFill>
+          <a:ln/>
+        </p:spPr>
+      </p:sp>
+      <p:sp>
+        <p:nvSpPr>
+          <p:cNvPr id="10" name="Text 8"/>
+          <p:cNvSpPr txBox="1"/>
+          <p:nvPr/>
+        </p:nvSpPr>
+        <p:spPr>
+          <a:xfrm>
+            <a:off x="10515600" y="2130552"/>
+            <a:ext cx="868680" cy="493776"/>
+          </a:xfrm>
+          <a:prstGeom prst="rect">
+            <a:avLst/>
+          </a:prstGeom>
+          <a:noFill/>
+          <a:ln/>
+        </p:spPr>
+        <p:txBody>
+          <a:bodyPr wrap="square" lIns="0" tIns="0" rIns="0" bIns="0" rtlCol="0" anchor="ctr"/>
+          <a:lstStyle/>
+          <a:p>
+            <a:pPr algn="ctr" indent="0" marL="0">
+              <a:buNone/>
+            </a:pPr>
+            <a:r>
+              <a:rPr lang="en-US" sz="1500" b="1" dirty="0">
+                <a:solidFill>
+                  <a:srgbClr val="2D63FF"/>
+                </a:solidFill>
+                <a:latin typeface="IBM Plex Mono" pitchFamily="34" charset="0"/>
+                <a:ea typeface="IBM Plex Mono" pitchFamily="34" charset="-122"/>
+                <a:cs typeface="IBM Plex Mono" pitchFamily="34" charset="-120"/>
+              </a:rPr>
+              <a:t>[3]</a:t>
+            </a:r>
+            <a:endParaRPr lang="en-US" sz="1500" dirty="0"/>
+          </a:p>
+        </p:txBody>
+      </p:sp>
+      <p:sp>
+        <p:nvSpPr>
+          <p:cNvPr id="11" name="Shape 9"/>
+          <p:cNvSpPr/>
+          <p:nvPr/>
+        </p:nvSpPr>
+        <p:spPr>
+          <a:xfrm>
+            <a:off x="502920" y="3127248"/>
+            <a:ext cx="11155680" cy="1097280"/>
+          </a:xfrm>
+          <a:prstGeom prst="roundRect">
+            <a:avLst>
+              <a:gd name="adj" fmla="val 10000"/>
+            </a:avLst>
+          </a:prstGeom>
+          <a:solidFill>
+            <a:srgbClr val="FFFFFF"/>
+          </a:solidFill>
+          <a:ln w="15875">
+            <a:solidFill>
+              <a:srgbClr val="D9DEE7"/>
+            </a:solidFill>
+            <a:prstDash val="solid"/>
+          </a:ln>
+        </p:spPr>
+      </p:sp>
+      <p:sp>
+        <p:nvSpPr>
+          <p:cNvPr id="12" name="Text 10"/>
+          <p:cNvSpPr txBox="1"/>
+          <p:nvPr/>
+        </p:nvSpPr>
+        <p:spPr>
+          <a:xfrm>
+            <a:off x="914400" y="3236976"/>
+            <a:ext cx="9418320" cy="877824"/>
+          </a:xfrm>
+          <a:prstGeom prst="rect">
+            <a:avLst/>
+          </a:prstGeom>
+          <a:noFill/>
+          <a:ln/>
+        </p:spPr>
+        <p:txBody>
+          <a:bodyPr wrap="square" lIns="0" tIns="0" rIns="0" bIns="0" rtlCol="0" anchor="ctr"/>
+          <a:lstStyle/>
+          <a:p>
+            <a:pPr indent="0" marL="0">
+              <a:lnSpc>
+                <a:spcPct val="118000"/>
+              </a:lnSpc>
+              <a:buNone/>
+            </a:pPr>
+            <a:r>
+              <a:rPr lang="en-US" sz="1700" dirty="0">
+                <a:solidFill>
+                  <a:srgbClr val="101828"/>
+                </a:solidFill>
+                <a:latin typeface="IBM Plex Sans" pitchFamily="34" charset="0"/>
+                <a:ea typeface="IBM Plex Sans" pitchFamily="34" charset="-122"/>
+                <a:cs typeface="IBM Plex Sans" pitchFamily="34" charset="-120"/>
+              </a:rPr>
+              <a:t>Write a program that reads twelve whole numbers into a grid of three rows of four, then prints the total of each row on a line of its own.</a:t>
+            </a:r>
+            <a:endParaRPr lang="en-US" sz="1700" dirty="0"/>
+          </a:p>
+        </p:txBody>
+      </p:sp>
+      <p:sp>
+        <p:nvSpPr>
+          <p:cNvPr id="13" name="Shape 11"/>
+          <p:cNvSpPr/>
+          <p:nvPr/>
+        </p:nvSpPr>
+        <p:spPr>
+          <a:xfrm>
+            <a:off x="10515600" y="3429000"/>
+            <a:ext cx="868680" cy="493776"/>
+          </a:xfrm>
+          <a:prstGeom prst="roundRect">
+            <a:avLst>
+              <a:gd name="adj" fmla="val 18519"/>
+            </a:avLst>
+          </a:prstGeom>
+          <a:solidFill>
+            <a:srgbClr val="EEF2FB"/>
+          </a:solidFill>
+          <a:ln/>
+        </p:spPr>
+      </p:sp>
+      <p:sp>
+        <p:nvSpPr>
+          <p:cNvPr id="14" name="Text 12"/>
+          <p:cNvSpPr txBox="1"/>
+          <p:nvPr/>
+        </p:nvSpPr>
+        <p:spPr>
+          <a:xfrm>
+            <a:off x="10515600" y="3429000"/>
+            <a:ext cx="868680" cy="493776"/>
+          </a:xfrm>
+          <a:prstGeom prst="rect">
+            <a:avLst/>
+          </a:prstGeom>
+          <a:noFill/>
+          <a:ln/>
+        </p:spPr>
+        <p:txBody>
+          <a:bodyPr wrap="square" lIns="0" tIns="0" rIns="0" bIns="0" rtlCol="0" anchor="ctr"/>
+          <a:lstStyle/>
+          <a:p>
+            <a:pPr algn="ctr" indent="0" marL="0">
+              <a:buNone/>
+            </a:pPr>
+            <a:r>
+              <a:rPr lang="en-US" sz="1500" b="1" dirty="0">
+                <a:solidFill>
+                  <a:srgbClr val="2D63FF"/>
+                </a:solidFill>
+                <a:latin typeface="IBM Plex Mono" pitchFamily="34" charset="0"/>
+                <a:ea typeface="IBM Plex Mono" pitchFamily="34" charset="-122"/>
+                <a:cs typeface="IBM Plex Mono" pitchFamily="34" charset="-120"/>
+              </a:rPr>
+              <a:t>[5]</a:t>
+            </a:r>
+            <a:endParaRPr lang="en-US" sz="1500" dirty="0"/>
+          </a:p>
+        </p:txBody>
+      </p:sp>
+      <p:sp>
+        <p:nvSpPr>
+          <p:cNvPr id="15" name="Shape 13"/>
+          <p:cNvSpPr/>
+          <p:nvPr/>
+        </p:nvSpPr>
+        <p:spPr>
+          <a:xfrm>
+            <a:off x="502920" y="4425696"/>
+            <a:ext cx="11155680" cy="1097280"/>
+          </a:xfrm>
+          <a:prstGeom prst="roundRect">
+            <a:avLst>
+              <a:gd name="adj" fmla="val 10000"/>
+            </a:avLst>
+          </a:prstGeom>
+          <a:solidFill>
+            <a:srgbClr val="FFFFFF"/>
+          </a:solidFill>
+          <a:ln w="15875">
+            <a:solidFill>
+              <a:srgbClr val="D9DEE7"/>
+            </a:solidFill>
+            <a:prstDash val="solid"/>
+          </a:ln>
+        </p:spPr>
+      </p:sp>
+      <p:sp>
+        <p:nvSpPr>
+          <p:cNvPr id="16" name="Text 14"/>
+          <p:cNvSpPr txBox="1"/>
+          <p:nvPr/>
+        </p:nvSpPr>
+        <p:spPr>
+          <a:xfrm>
+            <a:off x="914400" y="4535424"/>
+            <a:ext cx="9418320" cy="877824"/>
+          </a:xfrm>
+          <a:prstGeom prst="rect">
+            <a:avLst/>
+          </a:prstGeom>
+          <a:noFill/>
+          <a:ln/>
+        </p:spPr>
+        <p:txBody>
+          <a:bodyPr wrap="square" lIns="0" tIns="0" rIns="0" bIns="0" rtlCol="0" anchor="ctr"/>
+          <a:lstStyle/>
+          <a:p>
+            <a:pPr indent="0" marL="0">
+              <a:lnSpc>
+                <a:spcPct val="118000"/>
+              </a:lnSpc>
+              <a:buNone/>
+            </a:pPr>
+            <a:r>
+              <a:rPr lang="en-US" sz="1700" dirty="0">
+                <a:solidFill>
+                  <a:srgbClr val="101828"/>
+                </a:solidFill>
+                <a:latin typeface="IBM Plex Sans" pitchFamily="34" charset="0"/>
+                <a:ea typeface="IBM Plex Sans" pitchFamily="34" charset="-122"/>
+                <a:cs typeface="IBM Plex Sans" pitchFamily="34" charset="-120"/>
+              </a:rPr>
+              <a:t>A grid of 2 rows by 3 columns is already stored in a program. Write the code that prints it one row to a line, with single spaces between the values and no brackets.</a:t>
+            </a:r>
+            <a:endParaRPr lang="en-US" sz="1700" dirty="0"/>
+          </a:p>
+        </p:txBody>
+      </p:sp>
+      <p:sp>
+        <p:nvSpPr>
+          <p:cNvPr id="17" name="Shape 15"/>
+          <p:cNvSpPr/>
+          <p:nvPr/>
+        </p:nvSpPr>
+        <p:spPr>
+          <a:xfrm>
+            <a:off x="10515600" y="4727448"/>
+            <a:ext cx="868680" cy="493776"/>
+          </a:xfrm>
+          <a:prstGeom prst="roundRect">
+            <a:avLst>
+              <a:gd name="adj" fmla="val 18519"/>
+            </a:avLst>
+          </a:prstGeom>
+          <a:solidFill>
+            <a:srgbClr val="EEF2FB"/>
+          </a:solidFill>
+          <a:ln/>
+        </p:spPr>
+      </p:sp>
+      <p:sp>
+        <p:nvSpPr>
+          <p:cNvPr id="18" name="Text 16"/>
+          <p:cNvSpPr txBox="1"/>
+          <p:nvPr/>
+        </p:nvSpPr>
+        <p:spPr>
+          <a:xfrm>
+            <a:off x="10515600" y="4727448"/>
+            <a:ext cx="868680" cy="493776"/>
+          </a:xfrm>
+          <a:prstGeom prst="rect">
+            <a:avLst/>
+          </a:prstGeom>
+          <a:noFill/>
+          <a:ln/>
+        </p:spPr>
+        <p:txBody>
+          <a:bodyPr wrap="square" lIns="0" tIns="0" rIns="0" bIns="0" rtlCol="0" anchor="ctr"/>
+          <a:lstStyle/>
+          <a:p>
+            <a:pPr algn="ctr" indent="0" marL="0">
+              <a:buNone/>
+            </a:pPr>
+            <a:r>
+              <a:rPr lang="en-US" sz="1500" b="1" dirty="0">
+                <a:solidFill>
+                  <a:srgbClr val="2D63FF"/>
+                </a:solidFill>
+                <a:latin typeface="IBM Plex Mono" pitchFamily="34" charset="0"/>
+                <a:ea typeface="IBM Plex Mono" pitchFamily="34" charset="-122"/>
+                <a:cs typeface="IBM Plex Mono" pitchFamily="34" charset="-120"/>
+              </a:rPr>
+              <a:t>[4]</a:t>
+            </a:r>
+            <a:endParaRPr lang="en-US" sz="1500" dirty="0"/>
+          </a:p>
+        </p:txBody>
+      </p:sp>
+    </p:spTree>
+  </p:cSld>
+  <p:clrMapOvr>
+    <a:masterClrMapping/>
+  </p:clrMapOvr>
+</p:sld>
+</file>
+
+<file path=ppt/slides/slide15.xml><?xml version="1.0" encoding="utf-8"?>
+<p:sld xmlns:a="http://schemas.openxmlformats.org/drawingml/2006/main" xmlns:r="http://schemas.openxmlformats.org/officeDocument/2006/relationships" xmlns:p="http://schemas.openxmlformats.org/presentationml/2006/main">
+  <p:cSld name="Slide 15">
     <p:bg>
       <p:bgPr>
         <a:solidFill>
